--- a/reports/presentation.pptx
+++ b/reports/presentation.pptx
@@ -20,6 +20,9 @@
     <p:sldId id="268" r:id="rId19"/>
     <p:sldId id="269" r:id="rId20"/>
     <p:sldId id="270" r:id="rId21"/>
+    <p:sldId id="271" r:id="rId22"/>
+    <p:sldId id="272" r:id="rId23"/>
+    <p:sldId id="273" r:id="rId24"/>
   </p:sldIdLst>
   <p:sldSz cx="9144000" cy="6858000" type="screen4x3"/>
   <p:notesSz cx="6858000" cy="9144000"/>
@@ -3098,7 +3101,7 @@
     <p:bg>
       <p:bgPr>
         <a:solidFill>
-          <a:srgbClr val="1A1A2E"/>
+          <a:srgbClr val="0F172A"/>
         </a:solidFill>
         <a:effectLst/>
       </p:bgPr>
@@ -3112,30 +3115,13 @@
       <p:grpSpPr/>
       <p:sp>
         <p:nvSpPr>
-          <p:cNvPr id="2" name="Title 1"/>
-          <p:cNvSpPr>
-            <a:spLocks noGrp="1"/>
-          </p:cNvSpPr>
-          <p:nvPr>
-            <p:ph type="title"/>
-          </p:nvPr>
-        </p:nvSpPr>
-        <p:spPr/>
-        <p:txBody>
-          <a:bodyPr/>
-          <a:lstStyle/>
-          <a:p/>
-        </p:txBody>
-      </p:sp>
-      <p:sp>
-        <p:nvSpPr>
-          <p:cNvPr id="3" name="TextBox 2"/>
+          <p:cNvPr id="2" name="TextBox 1"/>
           <p:cNvSpPr txBox="1"/>
           <p:nvPr/>
         </p:nvSpPr>
         <p:spPr>
           <a:xfrm>
-            <a:off x="914400" y="1828800"/>
+            <a:off x="914400" y="2011680"/>
             <a:ext cx="7315200" cy="1371600"/>
           </a:xfrm>
           <a:prstGeom prst="rect">
@@ -3150,7 +3136,10 @@
           <a:lstStyle/>
           <a:p>
             <a:pPr algn="ctr">
-              <a:defRPr sz="3600" b="1">
+              <a:spcAft>
+                <a:spcPts val="1520"/>
+              </a:spcAft>
+              <a:defRPr sz="3800" b="1">
                 <a:solidFill>
                   <a:srgbClr val="FFFFFF"/>
                 </a:solidFill>
@@ -3159,7 +3148,18 @@
             <a:r>
               <a:t>Supplier Non-Compliance</a:t>
             </a:r>
-            <a:br/>
+          </a:p>
+          <a:p>
+            <a:pPr algn="ctr">
+              <a:spcAft>
+                <a:spcPts val="1520"/>
+              </a:spcAft>
+              <a:defRPr sz="3800" b="1">
+                <a:solidFill>
+                  <a:srgbClr val="FFFFFF"/>
+                </a:solidFill>
+              </a:defRPr>
+            </a:pPr>
             <a:r>
               <a:t>Risk Prediction</a:t>
             </a:r>
@@ -3168,14 +3168,14 @@
       </p:sp>
       <p:sp>
         <p:nvSpPr>
-          <p:cNvPr id="4" name="TextBox 3"/>
+          <p:cNvPr id="3" name="TextBox 2"/>
           <p:cNvSpPr txBox="1"/>
           <p:nvPr/>
         </p:nvSpPr>
         <p:spPr>
           <a:xfrm>
             <a:off x="914400" y="3474720"/>
-            <a:ext cx="7315200" cy="731520"/>
+            <a:ext cx="7315200" cy="914400"/>
           </a:xfrm>
           <a:prstGeom prst="rect">
             <a:avLst/>
@@ -3189,9 +3189,12 @@
           <a:lstStyle/>
           <a:p>
             <a:pPr algn="ctr">
-              <a:defRPr sz="1800" b="0">
-                <a:solidFill>
-                  <a:srgbClr val="FFFFFF"/>
+              <a:spcAft>
+                <a:spcPts val="640"/>
+              </a:spcAft>
+              <a:defRPr sz="1600" b="0">
+                <a:solidFill>
+                  <a:srgbClr val="CCCCDD"/>
                 </a:solidFill>
               </a:defRPr>
             </a:pPr>
@@ -3199,39 +3202,31 @@
               <a:t>AI Data Scientist Case Study — Qualifyze</a:t>
             </a:r>
           </a:p>
-        </p:txBody>
-      </p:sp>
-      <p:sp>
-        <p:nvSpPr>
-          <p:cNvPr id="5" name="TextBox 4"/>
-          <p:cNvSpPr txBox="1"/>
-          <p:nvPr/>
-        </p:nvSpPr>
-        <p:spPr>
-          <a:xfrm>
-            <a:off x="914400" y="5029200"/>
-            <a:ext cx="7315200" cy="548640"/>
-          </a:xfrm>
-          <a:prstGeom prst="rect">
-            <a:avLst/>
-          </a:prstGeom>
-          <a:noFill/>
-        </p:spPr>
-        <p:txBody>
-          <a:bodyPr wrap="square">
-            <a:spAutoFit/>
-          </a:bodyPr>
-          <a:lstStyle/>
           <a:p>
             <a:pPr algn="ctr">
-              <a:defRPr sz="1400" b="0">
-                <a:solidFill>
-                  <a:srgbClr val="FFFFFF"/>
-                </a:solidFill>
-              </a:defRPr>
-            </a:pPr>
-            <a:r>
-              <a:t>Santiago Dominguez | July 2026</a:t>
+              <a:spcAft>
+                <a:spcPts val="640"/>
+              </a:spcAft>
+              <a:defRPr sz="1600" b="0">
+                <a:solidFill>
+                  <a:srgbClr val="CCCCDD"/>
+                </a:solidFill>
+              </a:defRPr>
+            </a:pPr>
+          </a:p>
+          <a:p>
+            <a:pPr algn="ctr">
+              <a:spcAft>
+                <a:spcPts val="640"/>
+              </a:spcAft>
+              <a:defRPr sz="1600" b="0">
+                <a:solidFill>
+                  <a:srgbClr val="CCCCDD"/>
+                </a:solidFill>
+              </a:defRPr>
+            </a:pPr>
+            <a:r>
+              <a:t>Santiago Dominguez  |  July 2026</a:t>
             </a:r>
           </a:p>
         </p:txBody>
@@ -3247,6 +3242,14 @@
 <file path=ppt/slides/slide10.xml><?xml version="1.0" encoding="utf-8"?>
 <p:sld xmlns:a="http://schemas.openxmlformats.org/drawingml/2006/main" xmlns:p="http://schemas.openxmlformats.org/presentationml/2006/main" xmlns:r="http://schemas.openxmlformats.org/officeDocument/2006/relationships">
   <p:cSld>
+    <p:bg>
+      <p:bgPr>
+        <a:solidFill>
+          <a:srgbClr val="FFFFFF"/>
+        </a:solidFill>
+        <a:effectLst/>
+      </p:bgPr>
+    </p:bg>
     <p:spTree>
       <p:nvGrpSpPr>
         <p:cNvPr id="1" name=""/>
@@ -3256,31 +3259,14 @@
       <p:grpSpPr/>
       <p:sp>
         <p:nvSpPr>
-          <p:cNvPr id="2" name="Title 1"/>
-          <p:cNvSpPr>
-            <a:spLocks noGrp="1"/>
-          </p:cNvSpPr>
-          <p:nvPr>
-            <p:ph type="title"/>
-          </p:nvPr>
-        </p:nvSpPr>
-        <p:spPr/>
-        <p:txBody>
-          <a:bodyPr/>
-          <a:lstStyle/>
-          <a:p/>
-        </p:txBody>
-      </p:sp>
-      <p:sp>
-        <p:nvSpPr>
-          <p:cNvPr id="3" name="TextBox 2"/>
+          <p:cNvPr id="2" name="TextBox 1"/>
           <p:cNvSpPr txBox="1"/>
           <p:nvPr/>
         </p:nvSpPr>
         <p:spPr>
           <a:xfrm>
-            <a:off x="457200" y="274320"/>
-            <a:ext cx="8229600" cy="731520"/>
+            <a:off x="548640" y="365760"/>
+            <a:ext cx="8046720" cy="731520"/>
           </a:xfrm>
           <a:prstGeom prst="rect">
             <a:avLst/>
@@ -3294,21 +3280,289 @@
           <a:lstStyle/>
           <a:p>
             <a:pPr algn="l">
-              <a:defRPr sz="2400" b="1">
-                <a:solidFill>
-                  <a:srgbClr val="1A1A2E"/>
-                </a:solidFill>
-              </a:defRPr>
-            </a:pPr>
-            <a:r>
-              <a:t>SHAP — Global Explanation</a:t>
+              <a:spcAft>
+                <a:spcPts val="1040"/>
+              </a:spcAft>
+              <a:defRPr sz="2600" b="1">
+                <a:solidFill>
+                  <a:srgbClr val="1A1A2E"/>
+                </a:solidFill>
+              </a:defRPr>
+            </a:pPr>
+            <a:r>
+              <a:t>Threshold: Business-Driven Choice</a:t>
+            </a:r>
+          </a:p>
+        </p:txBody>
+      </p:sp>
+      <p:sp>
+        <p:nvSpPr>
+          <p:cNvPr id="3" name="Rectangle 2"/>
+          <p:cNvSpPr/>
+          <p:nvPr/>
+        </p:nvSpPr>
+        <p:spPr>
+          <a:xfrm>
+            <a:off x="548640" y="1005840"/>
+            <a:ext cx="1828800" cy="38100"/>
+          </a:xfrm>
+          <a:prstGeom prst="rect">
+            <a:avLst/>
+          </a:prstGeom>
+          <a:solidFill>
+            <a:srgbClr val="266DF0"/>
+          </a:solidFill>
+          <a:ln>
+            <a:noFill/>
+          </a:ln>
+        </p:spPr>
+        <p:style>
+          <a:lnRef idx="1">
+            <a:schemeClr val="accent1"/>
+          </a:lnRef>
+          <a:fillRef idx="3">
+            <a:schemeClr val="accent1"/>
+          </a:fillRef>
+          <a:effectRef idx="2">
+            <a:schemeClr val="accent1"/>
+          </a:effectRef>
+          <a:fontRef idx="minor">
+            <a:schemeClr val="lt1"/>
+          </a:fontRef>
+        </p:style>
+        <p:txBody>
+          <a:bodyPr rtlCol="0" anchor="ctr"/>
+          <a:lstStyle/>
+          <a:p>
+            <a:pPr algn="ctr"/>
+          </a:p>
+        </p:txBody>
+      </p:sp>
+      <p:sp>
+        <p:nvSpPr>
+          <p:cNvPr id="4" name="TextBox 3"/>
+          <p:cNvSpPr txBox="1"/>
+          <p:nvPr/>
+        </p:nvSpPr>
+        <p:spPr>
+          <a:xfrm>
+            <a:off x="548640" y="1280160"/>
+            <a:ext cx="8046720" cy="4572000"/>
+          </a:xfrm>
+          <a:prstGeom prst="rect">
+            <a:avLst/>
+          </a:prstGeom>
+          <a:noFill/>
+        </p:spPr>
+        <p:txBody>
+          <a:bodyPr wrap="square">
+            <a:spAutoFit/>
+          </a:bodyPr>
+          <a:lstStyle/>
+          <a:p>
+            <a:pPr algn="l">
+              <a:spcAft>
+                <a:spcPts val="600"/>
+              </a:spcAft>
+              <a:defRPr sz="1500" b="0">
+                <a:solidFill>
+                  <a:srgbClr val="1A1A2E"/>
+                </a:solidFill>
+              </a:defRPr>
+            </a:pPr>
+            <a:r>
+              <a:t>  The model outputs a probability → we choose where to cut</a:t>
+            </a:r>
+          </a:p>
+          <a:p>
+            <a:pPr algn="l">
+              <a:spcAft>
+                <a:spcPts val="600"/>
+              </a:spcAft>
+              <a:defRPr sz="1500" b="0">
+                <a:solidFill>
+                  <a:srgbClr val="1A1A2E"/>
+                </a:solidFill>
+              </a:defRPr>
+            </a:pPr>
+            <a:r>
+              <a:t>  </a:t>
+            </a:r>
+          </a:p>
+          <a:p>
+            <a:pPr algn="l">
+              <a:spcAft>
+                <a:spcPts val="600"/>
+              </a:spcAft>
+              <a:defRPr sz="1500" b="0">
+                <a:solidFill>
+                  <a:srgbClr val="1A1A2E"/>
+                </a:solidFill>
+              </a:defRPr>
+            </a:pPr>
+            <a:r>
+              <a:t>  FALSE POSITIVE (flag safe supplier)  → analyst reviews it, low cost</a:t>
+            </a:r>
+          </a:p>
+          <a:p>
+            <a:pPr algn="l">
+              <a:spcAft>
+                <a:spcPts val="600"/>
+              </a:spcAft>
+              <a:defRPr sz="1500" b="0">
+                <a:solidFill>
+                  <a:srgbClr val="1A1A2E"/>
+                </a:solidFill>
+              </a:defRPr>
+            </a:pPr>
+            <a:r>
+              <a:t>  FALSE NEGATIVE (miss risky supplier) → client gets enforcement action, high cost</a:t>
+            </a:r>
+          </a:p>
+          <a:p>
+            <a:pPr algn="l">
+              <a:spcAft>
+                <a:spcPts val="600"/>
+              </a:spcAft>
+              <a:defRPr sz="1500" b="0">
+                <a:solidFill>
+                  <a:srgbClr val="1A1A2E"/>
+                </a:solidFill>
+              </a:defRPr>
+            </a:pPr>
+            <a:r>
+              <a:t>  </a:t>
+            </a:r>
+          </a:p>
+          <a:p>
+            <a:pPr algn="l">
+              <a:spcAft>
+                <a:spcPts val="600"/>
+              </a:spcAft>
+              <a:defRPr sz="1500" b="0">
+                <a:solidFill>
+                  <a:srgbClr val="1A1A2E"/>
+                </a:solidFill>
+              </a:defRPr>
+            </a:pPr>
+            <a:r>
+              <a:t>  Recall 80%  |  Precision 14%  |  ~6 false alarms per true alert</a:t>
+            </a:r>
+          </a:p>
+          <a:p>
+            <a:pPr algn="l">
+              <a:spcAft>
+                <a:spcPts val="600"/>
+              </a:spcAft>
+              <a:defRPr sz="1500" b="0">
+                <a:solidFill>
+                  <a:srgbClr val="1A1A2E"/>
+                </a:solidFill>
+              </a:defRPr>
+            </a:pPr>
+            <a:r>
+              <a:t>  </a:t>
+            </a:r>
+          </a:p>
+          <a:p>
+            <a:pPr algn="l">
+              <a:spcAft>
+                <a:spcPts val="600"/>
+              </a:spcAft>
+              <a:defRPr sz="1500" b="0">
+                <a:solidFill>
+                  <a:srgbClr val="1A1A2E"/>
+                </a:solidFill>
+              </a:defRPr>
+            </a:pPr>
+            <a:r>
+              <a:t>  This is a SCREENING tool — flags for human review, not auto-reject</a:t>
+            </a:r>
+          </a:p>
+          <a:p>
+            <a:pPr algn="l">
+              <a:spcAft>
+                <a:spcPts val="600"/>
+              </a:spcAft>
+              <a:defRPr sz="1500" b="0">
+                <a:solidFill>
+                  <a:srgbClr val="1A1A2E"/>
+                </a:solidFill>
+              </a:defRPr>
+            </a:pPr>
+            <a:r>
+              <a:t>  Threshold is configurable per client's review capacity</a:t>
+            </a:r>
+          </a:p>
+        </p:txBody>
+      </p:sp>
+    </p:spTree>
+  </p:cSld>
+  <p:clrMapOvr>
+    <a:masterClrMapping/>
+  </p:clrMapOvr>
+</p:sld>
+</file>
+
+<file path=ppt/slides/slide11.xml><?xml version="1.0" encoding="utf-8"?>
+<p:sld xmlns:a="http://schemas.openxmlformats.org/drawingml/2006/main" xmlns:p="http://schemas.openxmlformats.org/presentationml/2006/main" xmlns:r="http://schemas.openxmlformats.org/officeDocument/2006/relationships">
+  <p:cSld>
+    <p:bg>
+      <p:bgPr>
+        <a:solidFill>
+          <a:srgbClr val="FFFFFF"/>
+        </a:solidFill>
+        <a:effectLst/>
+      </p:bgPr>
+    </p:bg>
+    <p:spTree>
+      <p:nvGrpSpPr>
+        <p:cNvPr id="1" name=""/>
+        <p:cNvGrpSpPr/>
+        <p:nvPr/>
+      </p:nvGrpSpPr>
+      <p:grpSpPr/>
+      <p:sp>
+        <p:nvSpPr>
+          <p:cNvPr id="2" name="TextBox 1"/>
+          <p:cNvSpPr txBox="1"/>
+          <p:nvPr/>
+        </p:nvSpPr>
+        <p:spPr>
+          <a:xfrm>
+            <a:off x="548640" y="274320"/>
+            <a:ext cx="8046720" cy="640080"/>
+          </a:xfrm>
+          <a:prstGeom prst="rect">
+            <a:avLst/>
+          </a:prstGeom>
+          <a:noFill/>
+        </p:spPr>
+        <p:txBody>
+          <a:bodyPr wrap="square">
+            <a:spAutoFit/>
+          </a:bodyPr>
+          <a:lstStyle/>
+          <a:p>
+            <a:pPr algn="l">
+              <a:spcAft>
+                <a:spcPts val="880"/>
+              </a:spcAft>
+              <a:defRPr sz="2200" b="1">
+                <a:solidFill>
+                  <a:srgbClr val="1A1A2E"/>
+                </a:solidFill>
+              </a:defRPr>
+            </a:pPr>
+            <a:r>
+              <a:t>What Drives Risk? (Feature Importance)</a:t>
             </a:r>
           </a:p>
         </p:txBody>
       </p:sp>
       <p:pic>
         <p:nvPicPr>
-          <p:cNvPr id="4" name="Picture 3" descr="fig_shap_beeswarm.png"/>
+          <p:cNvPr id="3" name="Picture 2" descr="fig_feature_importance.png"/>
           <p:cNvPicPr>
             <a:picLocks noChangeAspect="1"/>
           </p:cNvPicPr>
@@ -3322,8 +3576,8 @@
         </p:blipFill>
         <p:spPr>
           <a:xfrm>
-            <a:off x="731520" y="1188720"/>
-            <a:ext cx="7680960" cy="7146128"/>
+            <a:off x="548640" y="1005840"/>
+            <a:ext cx="8046720" cy="6338207"/>
           </a:xfrm>
           <a:prstGeom prst="rect">
             <a:avLst/>
@@ -3332,14 +3586,14 @@
       </p:pic>
       <p:sp>
         <p:nvSpPr>
-          <p:cNvPr id="5" name="TextBox 4"/>
+          <p:cNvPr id="4" name="TextBox 3"/>
           <p:cNvSpPr txBox="1"/>
           <p:nvPr/>
         </p:nvSpPr>
         <p:spPr>
           <a:xfrm>
-            <a:off x="457200" y="6400800"/>
-            <a:ext cx="8229600" cy="457200"/>
+            <a:off x="548640" y="6217920"/>
+            <a:ext cx="8046720" cy="457200"/>
           </a:xfrm>
           <a:prstGeom prst="rect">
             <a:avLst/>
@@ -3353,14 +3607,17 @@
           <a:lstStyle/>
           <a:p>
             <a:pPr algn="l">
-              <a:defRPr sz="1100" b="0">
-                <a:solidFill>
-                  <a:srgbClr val="1654CC"/>
-                </a:solidFill>
-              </a:defRPr>
-            </a:pPr>
-            <a:r>
-              <a:t>Each dot = one inspection. Red = high feature value. Position = impact on risk score.</a:t>
+              <a:spcAft>
+                <a:spcPts val="400"/>
+              </a:spcAft>
+              <a:defRPr sz="1000" b="0">
+                <a:solidFill>
+                  <a:srgbClr val="5A5A6E"/>
+                </a:solidFill>
+              </a:defRPr>
+            </a:pPr>
+            <a:r>
+              <a:t>n_prior_oai (41%) + recent_oai_rate (11%) + n_prior_nai (9%) — distributed, robust signal</a:t>
             </a:r>
           </a:p>
         </p:txBody>
@@ -3373,9 +3630,17 @@
 </p:sld>
 </file>
 
-<file path=ppt/slides/slide11.xml><?xml version="1.0" encoding="utf-8"?>
+<file path=ppt/slides/slide12.xml><?xml version="1.0" encoding="utf-8"?>
 <p:sld xmlns:a="http://schemas.openxmlformats.org/drawingml/2006/main" xmlns:p="http://schemas.openxmlformats.org/presentationml/2006/main" xmlns:r="http://schemas.openxmlformats.org/officeDocument/2006/relationships">
   <p:cSld>
+    <p:bg>
+      <p:bgPr>
+        <a:solidFill>
+          <a:srgbClr val="266DF0"/>
+        </a:solidFill>
+        <a:effectLst/>
+      </p:bgPr>
+    </p:bg>
     <p:spTree>
       <p:nvGrpSpPr>
         <p:cNvPr id="1" name=""/>
@@ -3385,31 +3650,14 @@
       <p:grpSpPr/>
       <p:sp>
         <p:nvSpPr>
-          <p:cNvPr id="2" name="Title 1"/>
-          <p:cNvSpPr>
-            <a:spLocks noGrp="1"/>
-          </p:cNvSpPr>
-          <p:nvPr>
-            <p:ph type="title"/>
-          </p:nvPr>
-        </p:nvSpPr>
-        <p:spPr/>
-        <p:txBody>
-          <a:bodyPr/>
-          <a:lstStyle/>
-          <a:p/>
-        </p:txBody>
-      </p:sp>
-      <p:sp>
-        <p:nvSpPr>
-          <p:cNvPr id="3" name="TextBox 2"/>
+          <p:cNvPr id="2" name="TextBox 1"/>
           <p:cNvSpPr txBox="1"/>
           <p:nvPr/>
         </p:nvSpPr>
         <p:spPr>
           <a:xfrm>
-            <a:off x="457200" y="274320"/>
-            <a:ext cx="8229600" cy="731520"/>
+            <a:off x="914400" y="2560320"/>
+            <a:ext cx="7315200" cy="1371600"/>
           </a:xfrm>
           <a:prstGeom prst="rect">
             <a:avLst/>
@@ -3422,22 +3670,89 @@
           </a:bodyPr>
           <a:lstStyle/>
           <a:p>
-            <a:pPr algn="l">
-              <a:defRPr sz="2400" b="1">
-                <a:solidFill>
-                  <a:srgbClr val="1A1A2E"/>
-                </a:solidFill>
-              </a:defRPr>
-            </a:pPr>
-            <a:r>
-              <a:t>SHAP — Why We Flagged This Supplier</a:t>
+            <a:pPr algn="ctr">
+              <a:spcAft>
+                <a:spcPts val="1360"/>
+              </a:spcAft>
+              <a:defRPr sz="3400" b="1">
+                <a:solidFill>
+                  <a:srgbClr val="FFFFFF"/>
+                </a:solidFill>
+              </a:defRPr>
+            </a:pPr>
+            <a:r>
+              <a:t>Interpretability</a:t>
+            </a:r>
+          </a:p>
+        </p:txBody>
+      </p:sp>
+    </p:spTree>
+  </p:cSld>
+  <p:clrMapOvr>
+    <a:masterClrMapping/>
+  </p:clrMapOvr>
+</p:sld>
+</file>
+
+<file path=ppt/slides/slide13.xml><?xml version="1.0" encoding="utf-8"?>
+<p:sld xmlns:a="http://schemas.openxmlformats.org/drawingml/2006/main" xmlns:p="http://schemas.openxmlformats.org/presentationml/2006/main" xmlns:r="http://schemas.openxmlformats.org/officeDocument/2006/relationships">
+  <p:cSld>
+    <p:bg>
+      <p:bgPr>
+        <a:solidFill>
+          <a:srgbClr val="FFFFFF"/>
+        </a:solidFill>
+        <a:effectLst/>
+      </p:bgPr>
+    </p:bg>
+    <p:spTree>
+      <p:nvGrpSpPr>
+        <p:cNvPr id="1" name=""/>
+        <p:cNvGrpSpPr/>
+        <p:nvPr/>
+      </p:nvGrpSpPr>
+      <p:grpSpPr/>
+      <p:sp>
+        <p:nvSpPr>
+          <p:cNvPr id="2" name="TextBox 1"/>
+          <p:cNvSpPr txBox="1"/>
+          <p:nvPr/>
+        </p:nvSpPr>
+        <p:spPr>
+          <a:xfrm>
+            <a:off x="548640" y="274320"/>
+            <a:ext cx="8046720" cy="640080"/>
+          </a:xfrm>
+          <a:prstGeom prst="rect">
+            <a:avLst/>
+          </a:prstGeom>
+          <a:noFill/>
+        </p:spPr>
+        <p:txBody>
+          <a:bodyPr wrap="square">
+            <a:spAutoFit/>
+          </a:bodyPr>
+          <a:lstStyle/>
+          <a:p>
+            <a:pPr algn="l">
+              <a:spcAft>
+                <a:spcPts val="880"/>
+              </a:spcAft>
+              <a:defRPr sz="2200" b="1">
+                <a:solidFill>
+                  <a:srgbClr val="1A1A2E"/>
+                </a:solidFill>
+              </a:defRPr>
+            </a:pPr>
+            <a:r>
+              <a:t>SHAP — Every Prediction is Explainable</a:t>
             </a:r>
           </a:p>
         </p:txBody>
       </p:sp>
       <p:pic>
         <p:nvPicPr>
-          <p:cNvPr id="4" name="Picture 3" descr="fig_shap_true_positive.png"/>
+          <p:cNvPr id="3" name="Picture 2" descr="fig_shap_beeswarm.png"/>
           <p:cNvPicPr>
             <a:picLocks noChangeAspect="1"/>
           </p:cNvPicPr>
@@ -3451,8 +3766,8 @@
         </p:blipFill>
         <p:spPr>
           <a:xfrm>
-            <a:off x="731520" y="1188720"/>
-            <a:ext cx="7680960" cy="5967851"/>
+            <a:off x="548640" y="1005840"/>
+            <a:ext cx="8046720" cy="7486420"/>
           </a:xfrm>
           <a:prstGeom prst="rect">
             <a:avLst/>
@@ -3461,14 +3776,14 @@
       </p:pic>
       <p:sp>
         <p:nvSpPr>
-          <p:cNvPr id="5" name="TextBox 4"/>
+          <p:cNvPr id="4" name="TextBox 3"/>
           <p:cNvSpPr txBox="1"/>
           <p:nvPr/>
         </p:nvSpPr>
         <p:spPr>
           <a:xfrm>
-            <a:off x="457200" y="6400800"/>
-            <a:ext cx="8229600" cy="457200"/>
+            <a:off x="548640" y="6217920"/>
+            <a:ext cx="8046720" cy="457200"/>
           </a:xfrm>
           <a:prstGeom prst="rect">
             <a:avLst/>
@@ -3482,417 +3797,17 @@
           <a:lstStyle/>
           <a:p>
             <a:pPr algn="l">
-              <a:defRPr sz="1100" b="0">
-                <a:solidFill>
-                  <a:srgbClr val="1654CC"/>
-                </a:solidFill>
-              </a:defRPr>
-            </a:pPr>
-            <a:r>
-              <a:t>Waterfall decomposition: each feature's contribution to this specific prediction.</a:t>
-            </a:r>
-          </a:p>
-        </p:txBody>
-      </p:sp>
-    </p:spTree>
-  </p:cSld>
-  <p:clrMapOvr>
-    <a:masterClrMapping/>
-  </p:clrMapOvr>
-</p:sld>
-</file>
-
-<file path=ppt/slides/slide12.xml><?xml version="1.0" encoding="utf-8"?>
-<p:sld xmlns:a="http://schemas.openxmlformats.org/drawingml/2006/main" xmlns:p="http://schemas.openxmlformats.org/presentationml/2006/main" xmlns:r="http://schemas.openxmlformats.org/officeDocument/2006/relationships">
-  <p:cSld>
-    <p:spTree>
-      <p:nvGrpSpPr>
-        <p:cNvPr id="1" name=""/>
-        <p:cNvGrpSpPr/>
-        <p:nvPr/>
-      </p:nvGrpSpPr>
-      <p:grpSpPr/>
-      <p:sp>
-        <p:nvSpPr>
-          <p:cNvPr id="2" name="Title 1"/>
-          <p:cNvSpPr>
-            <a:spLocks noGrp="1"/>
-          </p:cNvSpPr>
-          <p:nvPr>
-            <p:ph type="title"/>
-          </p:nvPr>
-        </p:nvSpPr>
-        <p:spPr/>
-        <p:txBody>
-          <a:bodyPr/>
-          <a:lstStyle/>
-          <a:p>
-            <a:pPr>
-              <a:defRPr sz="2800">
-                <a:solidFill>
-                  <a:srgbClr val="1A1A2E"/>
-                </a:solidFill>
-              </a:defRPr>
-            </a:pPr>
-            <a:r>
-              <a:t>Production &amp; MLOps</a:t>
-            </a:r>
-          </a:p>
-        </p:txBody>
-      </p:sp>
-      <p:sp>
-        <p:nvSpPr>
-          <p:cNvPr id="3" name="Content Placeholder 2"/>
-          <p:cNvSpPr>
-            <a:spLocks noGrp="1"/>
-          </p:cNvSpPr>
-          <p:nvPr>
-            <p:ph idx="1"/>
-          </p:nvPr>
-        </p:nvSpPr>
-        <p:spPr/>
-        <p:txBody>
-          <a:bodyPr/>
-          <a:lstStyle/>
-          <a:p>
-            <a:pPr>
-              <a:spcAft>
-                <a:spcPts val="1200"/>
-              </a:spcAft>
-              <a:defRPr sz="1400">
-                <a:solidFill>
-                  <a:srgbClr val="1654CC"/>
-                </a:solidFill>
-              </a:defRPr>
-            </a:pPr>
-            <a:r>
-              <a:t>4 Airflow DAGs + Docker Compose provided in repository</a:t>
-            </a:r>
-          </a:p>
-          <a:p>
-            <a:pPr>
-              <a:spcAft>
-                <a:spcPts val="800"/>
-              </a:spcAft>
-              <a:defRPr sz="1600">
-                <a:solidFill>
-                  <a:srgbClr val="1A1A2E"/>
-                </a:solidFill>
-              </a:defRPr>
-            </a:pPr>
-            <a:r>
-              <a:t>Airflow DAGs for orchestration:</a:t>
-            </a:r>
-          </a:p>
-          <a:p>
-            <a:pPr>
-              <a:spcAft>
-                <a:spcPts val="800"/>
-              </a:spcAft>
-              <a:defRPr sz="1600">
-                <a:solidFill>
-                  <a:srgbClr val="1A1A2E"/>
-                </a:solidFill>
-              </a:defRPr>
-            </a:pPr>
-            <a:r>
-              <a:t>  • Weekly data refresh (FDA APIs)</a:t>
-            </a:r>
-          </a:p>
-          <a:p>
-            <a:pPr>
-              <a:spcAft>
-                <a:spcPts val="800"/>
-              </a:spcAft>
-              <a:defRPr sz="1600">
-                <a:solidFill>
-                  <a:srgbClr val="1A1A2E"/>
-                </a:solidFill>
-              </a:defRPr>
-            </a:pPr>
-            <a:r>
-              <a:t>  • Feature pipeline (triggered after ingestion)</a:t>
-            </a:r>
-          </a:p>
-          <a:p>
-            <a:pPr>
-              <a:spcAft>
-                <a:spcPts val="800"/>
-              </a:spcAft>
-              <a:defRPr sz="1600">
-                <a:solidFill>
-                  <a:srgbClr val="1A1A2E"/>
-                </a:solidFill>
-              </a:defRPr>
-            </a:pPr>
-            <a:r>
-              <a:t>  • Monthly model retrain (champion/challenger)</a:t>
-            </a:r>
-          </a:p>
-          <a:p>
-            <a:pPr>
-              <a:spcAft>
-                <a:spcPts val="800"/>
-              </a:spcAft>
-              <a:defRPr sz="1600">
-                <a:solidFill>
-                  <a:srgbClr val="1A1A2E"/>
-                </a:solidFill>
-              </a:defRPr>
-            </a:pPr>
-            <a:r>
-              <a:t>  • Weekly batch scoring (risk tiers for all facilities)</a:t>
-            </a:r>
-          </a:p>
-          <a:p>
-            <a:pPr>
-              <a:spcAft>
-                <a:spcPts val="800"/>
-              </a:spcAft>
-              <a:defRPr sz="1600">
-                <a:solidFill>
-                  <a:srgbClr val="1A1A2E"/>
-                </a:solidFill>
-              </a:defRPr>
-            </a:pPr>
-          </a:p>
-          <a:p>
-            <a:pPr>
-              <a:spcAft>
-                <a:spcPts val="800"/>
-              </a:spcAft>
-              <a:defRPr sz="1600">
-                <a:solidFill>
-                  <a:srgbClr val="1A1A2E"/>
-                </a:solidFill>
-              </a:defRPr>
-            </a:pPr>
-            <a:r>
-              <a:t>Docker Compose for local development</a:t>
-            </a:r>
-          </a:p>
-          <a:p>
-            <a:pPr>
-              <a:spcAft>
-                <a:spcPts val="800"/>
-              </a:spcAft>
-              <a:defRPr sz="1600">
-                <a:solidFill>
-                  <a:srgbClr val="1A1A2E"/>
-                </a:solidFill>
-              </a:defRPr>
-            </a:pPr>
-            <a:r>
-              <a:t>Model drift monitoring: track score distribution weekly</a:t>
-            </a:r>
-          </a:p>
-        </p:txBody>
-      </p:sp>
-    </p:spTree>
-  </p:cSld>
-  <p:clrMapOvr>
-    <a:masterClrMapping/>
-  </p:clrMapOvr>
-</p:sld>
-</file>
-
-<file path=ppt/slides/slide13.xml><?xml version="1.0" encoding="utf-8"?>
-<p:sld xmlns:a="http://schemas.openxmlformats.org/drawingml/2006/main" xmlns:p="http://schemas.openxmlformats.org/presentationml/2006/main" xmlns:r="http://schemas.openxmlformats.org/officeDocument/2006/relationships">
-  <p:cSld>
-    <p:spTree>
-      <p:nvGrpSpPr>
-        <p:cNvPr id="1" name=""/>
-        <p:cNvGrpSpPr/>
-        <p:nvPr/>
-      </p:nvGrpSpPr>
-      <p:grpSpPr/>
-      <p:sp>
-        <p:nvSpPr>
-          <p:cNvPr id="2" name="Title 1"/>
-          <p:cNvSpPr>
-            <a:spLocks noGrp="1"/>
-          </p:cNvSpPr>
-          <p:nvPr>
-            <p:ph type="title"/>
-          </p:nvPr>
-        </p:nvSpPr>
-        <p:spPr/>
-        <p:txBody>
-          <a:bodyPr/>
-          <a:lstStyle/>
-          <a:p>
-            <a:pPr>
-              <a:defRPr sz="2800">
-                <a:solidFill>
-                  <a:srgbClr val="1A1A2E"/>
-                </a:solidFill>
-              </a:defRPr>
-            </a:pPr>
-            <a:r>
-              <a:t>Limitations &amp; Next Steps</a:t>
-            </a:r>
-          </a:p>
-        </p:txBody>
-      </p:sp>
-      <p:sp>
-        <p:nvSpPr>
-          <p:cNvPr id="3" name="Content Placeholder 2"/>
-          <p:cNvSpPr>
-            <a:spLocks noGrp="1"/>
-          </p:cNvSpPr>
-          <p:nvPr>
-            <p:ph idx="1"/>
-          </p:nvPr>
-        </p:nvSpPr>
-        <p:spPr/>
-        <p:txBody>
-          <a:bodyPr/>
-          <a:lstStyle/>
-          <a:p>
-            <a:pPr>
-              <a:spcAft>
-                <a:spcPts val="800"/>
-              </a:spcAft>
-              <a:defRPr sz="1600">
-                <a:solidFill>
-                  <a:srgbClr val="1A1A2E"/>
-                </a:solidFill>
-              </a:defRPr>
-            </a:pPr>
-            <a:r>
-              <a:t>Limitations:</a:t>
-            </a:r>
-          </a:p>
-          <a:p>
-            <a:pPr>
-              <a:spcAft>
-                <a:spcPts val="800"/>
-              </a:spcAft>
-              <a:defRPr sz="1600">
-                <a:solidFill>
-                  <a:srgbClr val="1A1A2E"/>
-                </a:solidFill>
-              </a:defRPr>
-            </a:pPr>
-            <a:r>
-              <a:t>  • Cannot predict first-time offenders (no prior history)</a:t>
-            </a:r>
-          </a:p>
-          <a:p>
-            <a:pPr>
-              <a:spcAft>
-                <a:spcPts val="800"/>
-              </a:spcAft>
-              <a:defRPr sz="1600">
-                <a:solidFill>
-                  <a:srgbClr val="1A1A2E"/>
-                </a:solidFill>
-              </a:defRPr>
-            </a:pPr>
-            <a:r>
-              <a:t>  • FDA database is not comprehensive</a:t>
-            </a:r>
-          </a:p>
-          <a:p>
-            <a:pPr>
-              <a:spcAft>
-                <a:spcPts val="800"/>
-              </a:spcAft>
-              <a:defRPr sz="1600">
-                <a:solidFill>
-                  <a:srgbClr val="1A1A2E"/>
-                </a:solidFill>
-              </a:defRPr>
-            </a:pPr>
-            <a:r>
-              <a:t>  • Entity matching ~34% coverage for warning letters</a:t>
-            </a:r>
-          </a:p>
-          <a:p>
-            <a:pPr>
-              <a:spcAft>
-                <a:spcPts val="800"/>
-              </a:spcAft>
-              <a:defRPr sz="1600">
-                <a:solidFill>
-                  <a:srgbClr val="1A1A2E"/>
-                </a:solidFill>
-              </a:defRPr>
-            </a:pPr>
-          </a:p>
-          <a:p>
-            <a:pPr>
-              <a:spcAft>
-                <a:spcPts val="800"/>
-              </a:spcAft>
-              <a:defRPr sz="1600">
-                <a:solidFill>
-                  <a:srgbClr val="1A1A2E"/>
-                </a:solidFill>
-              </a:defRPr>
-            </a:pPr>
-            <a:r>
-              <a:t>Next steps for improvement:</a:t>
-            </a:r>
-          </a:p>
-          <a:p>
-            <a:pPr>
-              <a:spcAft>
-                <a:spcPts val="800"/>
-              </a:spcAft>
-              <a:defRPr sz="1600">
-                <a:solidFill>
-                  <a:srgbClr val="1A1A2E"/>
-                </a:solidFill>
-              </a:defRPr>
-            </a:pPr>
-            <a:r>
-              <a:t>  • Integrate Qualifyze private audit data (biggest lift)</a:t>
-            </a:r>
-          </a:p>
-          <a:p>
-            <a:pPr>
-              <a:spcAft>
-                <a:spcPts val="800"/>
-              </a:spcAft>
-              <a:defRPr sz="1600">
-                <a:solidFill>
-                  <a:srgbClr val="1A1A2E"/>
-                </a:solidFill>
-              </a:defRPr>
-            </a:pPr>
-            <a:r>
-              <a:t>  • NLP on citation text (severity categorization)</a:t>
-            </a:r>
-          </a:p>
-          <a:p>
-            <a:pPr>
-              <a:spcAft>
-                <a:spcPts val="800"/>
-              </a:spcAft>
-              <a:defRPr sz="1600">
-                <a:solidFill>
-                  <a:srgbClr val="1A1A2E"/>
-                </a:solidFill>
-              </a:defRPr>
-            </a:pPr>
-            <a:r>
-              <a:t>  • Survival analysis (time-to-next-OAI)</a:t>
-            </a:r>
-          </a:p>
-          <a:p>
-            <a:pPr>
-              <a:spcAft>
-                <a:spcPts val="800"/>
-              </a:spcAft>
-              <a:defRPr sz="1600">
-                <a:solidFill>
-                  <a:srgbClr val="1A1A2E"/>
-                </a:solidFill>
-              </a:defRPr>
-            </a:pPr>
-            <a:r>
-              <a:t>  • Active learning from analyst feedback</a:t>
+              <a:spcAft>
+                <a:spcPts val="400"/>
+              </a:spcAft>
+              <a:defRPr sz="1000" b="0">
+                <a:solidFill>
+                  <a:srgbClr val="5A5A6E"/>
+                </a:solidFill>
+              </a:defRPr>
+            </a:pPr>
+            <a:r>
+              <a:t>Each dot = one inspection. Color = feature value (red=high). Position = impact on risk.</a:t>
             </a:r>
           </a:p>
         </p:txBody>
@@ -3911,7 +3826,7 @@
     <p:bg>
       <p:bgPr>
         <a:solidFill>
-          <a:srgbClr val="1A1A2E"/>
+          <a:srgbClr val="FFFFFF"/>
         </a:solidFill>
         <a:effectLst/>
       </p:bgPr>
@@ -3925,31 +3840,14 @@
       <p:grpSpPr/>
       <p:sp>
         <p:nvSpPr>
-          <p:cNvPr id="2" name="Title 1"/>
-          <p:cNvSpPr>
-            <a:spLocks noGrp="1"/>
-          </p:cNvSpPr>
-          <p:nvPr>
-            <p:ph type="title"/>
-          </p:nvPr>
-        </p:nvSpPr>
-        <p:spPr/>
-        <p:txBody>
-          <a:bodyPr/>
-          <a:lstStyle/>
-          <a:p/>
-        </p:txBody>
-      </p:sp>
-      <p:sp>
-        <p:nvSpPr>
-          <p:cNvPr id="3" name="TextBox 2"/>
+          <p:cNvPr id="2" name="TextBox 1"/>
           <p:cNvSpPr txBox="1"/>
           <p:nvPr/>
         </p:nvSpPr>
         <p:spPr>
           <a:xfrm>
-            <a:off x="914400" y="1371600"/>
-            <a:ext cx="7315200" cy="914400"/>
+            <a:off x="548640" y="365760"/>
+            <a:ext cx="8046720" cy="731520"/>
           </a:xfrm>
           <a:prstGeom prst="rect">
             <a:avLst/>
@@ -3962,16 +3860,62 @@
           </a:bodyPr>
           <a:lstStyle/>
           <a:p>
-            <a:pPr algn="ctr">
-              <a:defRPr sz="3200" b="1">
-                <a:solidFill>
-                  <a:srgbClr val="FFFFFF"/>
-                </a:solidFill>
-              </a:defRPr>
-            </a:pPr>
-            <a:r>
-              <a:t>Key Takeaways</a:t>
-            </a:r>
+            <a:pPr algn="l">
+              <a:spcAft>
+                <a:spcPts val="1040"/>
+              </a:spcAft>
+              <a:defRPr sz="2600" b="1">
+                <a:solidFill>
+                  <a:srgbClr val="1A1A2E"/>
+                </a:solidFill>
+              </a:defRPr>
+            </a:pPr>
+            <a:r>
+              <a:t>Supplier Risk Report (Production Output)</a:t>
+            </a:r>
+          </a:p>
+        </p:txBody>
+      </p:sp>
+      <p:sp>
+        <p:nvSpPr>
+          <p:cNvPr id="3" name="Rectangle 2"/>
+          <p:cNvSpPr/>
+          <p:nvPr/>
+        </p:nvSpPr>
+        <p:spPr>
+          <a:xfrm>
+            <a:off x="548640" y="1005840"/>
+            <a:ext cx="1828800" cy="38100"/>
+          </a:xfrm>
+          <a:prstGeom prst="rect">
+            <a:avLst/>
+          </a:prstGeom>
+          <a:solidFill>
+            <a:srgbClr val="266DF0"/>
+          </a:solidFill>
+          <a:ln>
+            <a:noFill/>
+          </a:ln>
+        </p:spPr>
+        <p:style>
+          <a:lnRef idx="1">
+            <a:schemeClr val="accent1"/>
+          </a:lnRef>
+          <a:fillRef idx="3">
+            <a:schemeClr val="accent1"/>
+          </a:fillRef>
+          <a:effectRef idx="2">
+            <a:schemeClr val="accent1"/>
+          </a:effectRef>
+          <a:fontRef idx="minor">
+            <a:schemeClr val="lt1"/>
+          </a:fontRef>
+        </p:style>
+        <p:txBody>
+          <a:bodyPr rtlCol="0" anchor="ctr"/>
+          <a:lstStyle/>
+          <a:p>
+            <a:pPr algn="ctr"/>
           </a:p>
         </p:txBody>
       </p:sp>
@@ -3983,8 +3927,8 @@
         </p:nvSpPr>
         <p:spPr>
           <a:xfrm>
-            <a:off x="1097280" y="2560320"/>
-            <a:ext cx="6949440" cy="640080"/>
+            <a:off x="548640" y="1280160"/>
+            <a:ext cx="8046720" cy="4572000"/>
           </a:xfrm>
           <a:prstGeom prst="rect">
             <a:avLst/>
@@ -3998,154 +3942,167 @@
           <a:lstStyle/>
           <a:p>
             <a:pPr algn="l">
-              <a:defRPr sz="1600" b="0">
-                <a:solidFill>
-                  <a:srgbClr val="FFFFFF"/>
-                </a:solidFill>
-              </a:defRPr>
-            </a:pPr>
-            <a:r>
-              <a:t>1. Public FDA data alone achieves ROC-AUC 0.87 for OAI prediction</a:t>
-            </a:r>
-          </a:p>
-        </p:txBody>
-      </p:sp>
-      <p:sp>
-        <p:nvSpPr>
-          <p:cNvPr id="5" name="TextBox 4"/>
-          <p:cNvSpPr txBox="1"/>
-          <p:nvPr/>
-        </p:nvSpPr>
-        <p:spPr>
-          <a:xfrm>
-            <a:off x="1097280" y="3291839"/>
-            <a:ext cx="6949440" cy="640080"/>
-          </a:xfrm>
-          <a:prstGeom prst="rect">
-            <a:avLst/>
-          </a:prstGeom>
-          <a:noFill/>
-        </p:spPr>
-        <p:txBody>
-          <a:bodyPr wrap="square">
-            <a:spAutoFit/>
-          </a:bodyPr>
-          <a:lstStyle/>
-          <a:p>
-            <a:pPr algn="l">
-              <a:defRPr sz="1600" b="0">
-                <a:solidFill>
-                  <a:srgbClr val="FFFFFF"/>
-                </a:solidFill>
-              </a:defRPr>
-            </a:pPr>
-            <a:r>
-              <a:t>2. Every prediction is fully explainable (SHAP)</a:t>
-            </a:r>
-          </a:p>
-        </p:txBody>
-      </p:sp>
-      <p:sp>
-        <p:nvSpPr>
-          <p:cNvPr id="6" name="TextBox 5"/>
-          <p:cNvSpPr txBox="1"/>
-          <p:nvPr/>
-        </p:nvSpPr>
-        <p:spPr>
-          <a:xfrm>
-            <a:off x="1097280" y="4023360"/>
-            <a:ext cx="6949440" cy="640080"/>
-          </a:xfrm>
-          <a:prstGeom prst="rect">
-            <a:avLst/>
-          </a:prstGeom>
-          <a:noFill/>
-        </p:spPr>
-        <p:txBody>
-          <a:bodyPr wrap="square">
-            <a:spAutoFit/>
-          </a:bodyPr>
-          <a:lstStyle/>
-          <a:p>
-            <a:pPr algn="l">
-              <a:defRPr sz="1600" b="0">
-                <a:solidFill>
-                  <a:srgbClr val="FFFFFF"/>
-                </a:solidFill>
-              </a:defRPr>
-            </a:pPr>
-            <a:r>
-              <a:t>3. The model is a screening tool — human always in the loop</a:t>
-            </a:r>
-          </a:p>
-        </p:txBody>
-      </p:sp>
-      <p:sp>
-        <p:nvSpPr>
-          <p:cNvPr id="7" name="TextBox 6"/>
-          <p:cNvSpPr txBox="1"/>
-          <p:nvPr/>
-        </p:nvSpPr>
-        <p:spPr>
-          <a:xfrm>
-            <a:off x="1097280" y="4754880"/>
-            <a:ext cx="6949440" cy="640080"/>
-          </a:xfrm>
-          <a:prstGeom prst="rect">
-            <a:avLst/>
-          </a:prstGeom>
-          <a:noFill/>
-        </p:spPr>
-        <p:txBody>
-          <a:bodyPr wrap="square">
-            <a:spAutoFit/>
-          </a:bodyPr>
-          <a:lstStyle/>
-          <a:p>
-            <a:pPr algn="l">
-              <a:defRPr sz="1600" b="0">
-                <a:solidFill>
-                  <a:srgbClr val="FFFFFF"/>
-                </a:solidFill>
-              </a:defRPr>
-            </a:pPr>
-            <a:r>
-              <a:t>4. Private audit data is where the real value multiplier is</a:t>
-            </a:r>
-          </a:p>
-        </p:txBody>
-      </p:sp>
-      <p:sp>
-        <p:nvSpPr>
-          <p:cNvPr id="8" name="TextBox 7"/>
-          <p:cNvSpPr txBox="1"/>
-          <p:nvPr/>
-        </p:nvSpPr>
-        <p:spPr>
-          <a:xfrm>
-            <a:off x="1097280" y="5486400"/>
-            <a:ext cx="6949440" cy="640080"/>
-          </a:xfrm>
-          <a:prstGeom prst="rect">
-            <a:avLst/>
-          </a:prstGeom>
-          <a:noFill/>
-        </p:spPr>
-        <p:txBody>
-          <a:bodyPr wrap="square">
-            <a:spAutoFit/>
-          </a:bodyPr>
-          <a:lstStyle/>
-          <a:p>
-            <a:pPr algn="l">
-              <a:defRPr sz="1600" b="0">
-                <a:solidFill>
-                  <a:srgbClr val="FFFFFF"/>
-                </a:solidFill>
-              </a:defRPr>
-            </a:pPr>
-            <a:r>
-              <a:t>5. Production-ready architecture with Airflow + drift monitoring</a:t>
+              <a:spcAft>
+                <a:spcPts val="600"/>
+              </a:spcAft>
+              <a:defRPr sz="1500" b="0">
+                <a:solidFill>
+                  <a:srgbClr val="1A1A2E"/>
+                </a:solidFill>
+              </a:defRPr>
+            </a:pPr>
+            <a:r>
+              <a:t>  FACILITY: Acme Pharma (FEI: 3007058211)</a:t>
+            </a:r>
+          </a:p>
+          <a:p>
+            <a:pPr algn="l">
+              <a:spcAft>
+                <a:spcPts val="600"/>
+              </a:spcAft>
+              <a:defRPr sz="1500" b="0">
+                <a:solidFill>
+                  <a:srgbClr val="1A1A2E"/>
+                </a:solidFill>
+              </a:defRPr>
+            </a:pPr>
+            <a:r>
+              <a:t>  RISK SCORE: 95.2%  —  CRITICAL</a:t>
+            </a:r>
+          </a:p>
+          <a:p>
+            <a:pPr algn="l">
+              <a:spcAft>
+                <a:spcPts val="600"/>
+              </a:spcAft>
+              <a:defRPr sz="1500" b="0">
+                <a:solidFill>
+                  <a:srgbClr val="1A1A2E"/>
+                </a:solidFill>
+              </a:defRPr>
+            </a:pPr>
+            <a:r>
+              <a:t>  </a:t>
+            </a:r>
+          </a:p>
+          <a:p>
+            <a:pPr algn="l">
+              <a:spcAft>
+                <a:spcPts val="600"/>
+              </a:spcAft>
+              <a:defRPr sz="1500" b="0">
+                <a:solidFill>
+                  <a:srgbClr val="1A1A2E"/>
+                </a:solidFill>
+              </a:defRPr>
+            </a:pPr>
+            <a:r>
+              <a:t>  Risk Drivers:</a:t>
+            </a:r>
+          </a:p>
+          <a:p>
+            <a:pPr algn="l">
+              <a:spcAft>
+                <a:spcPts val="600"/>
+              </a:spcAft>
+              <a:defRPr sz="1500" b="0">
+                <a:solidFill>
+                  <a:srgbClr val="1A1A2E"/>
+                </a:solidFill>
+              </a:defRPr>
+            </a:pPr>
+            <a:r>
+              <a:t>    ↑ 2 prior OAI inspections              (+25%)</a:t>
+            </a:r>
+          </a:p>
+          <a:p>
+            <a:pPr algn="l">
+              <a:spcAft>
+                <a:spcPts val="600"/>
+              </a:spcAft>
+              <a:defRPr sz="1500" b="0">
+                <a:solidFill>
+                  <a:srgbClr val="1A1A2E"/>
+                </a:solidFill>
+              </a:defRPr>
+            </a:pPr>
+            <a:r>
+              <a:t>    ↑ Recent OAI rate = 1.0                 (+15%)</a:t>
+            </a:r>
+          </a:p>
+          <a:p>
+            <a:pPr algn="l">
+              <a:spcAft>
+                <a:spcPts val="600"/>
+              </a:spcAft>
+              <a:defRPr sz="1500" b="0">
+                <a:solidFill>
+                  <a:srgbClr val="1A1A2E"/>
+                </a:solidFill>
+              </a:defRPr>
+            </a:pPr>
+            <a:r>
+              <a:t>    ↑ 0 clean (NAI) inspections             (+10%)</a:t>
+            </a:r>
+          </a:p>
+          <a:p>
+            <a:pPr algn="l">
+              <a:spcAft>
+                <a:spcPts val="600"/>
+              </a:spcAft>
+              <a:defRPr sz="1500" b="0">
+                <a:solidFill>
+                  <a:srgbClr val="1A1A2E"/>
+                </a:solidFill>
+              </a:defRPr>
+            </a:pPr>
+            <a:r>
+              <a:t>    ↑ Veterinary / high-risk sector          (+5%)</a:t>
+            </a:r>
+          </a:p>
+          <a:p>
+            <a:pPr algn="l">
+              <a:spcAft>
+                <a:spcPts val="600"/>
+              </a:spcAft>
+              <a:defRPr sz="1500" b="0">
+                <a:solidFill>
+                  <a:srgbClr val="1A1A2E"/>
+                </a:solidFill>
+              </a:defRPr>
+            </a:pPr>
+            <a:r>
+              <a:t>  </a:t>
+            </a:r>
+          </a:p>
+          <a:p>
+            <a:pPr algn="l">
+              <a:spcAft>
+                <a:spcPts val="600"/>
+              </a:spcAft>
+              <a:defRPr sz="1500" b="0">
+                <a:solidFill>
+                  <a:srgbClr val="1A1A2E"/>
+                </a:solidFill>
+              </a:defRPr>
+            </a:pPr>
+            <a:r>
+              <a:t>  Every prediction has a human-readable explanation</a:t>
+            </a:r>
+          </a:p>
+          <a:p>
+            <a:pPr algn="l">
+              <a:spcAft>
+                <a:spcPts val="600"/>
+              </a:spcAft>
+              <a:defRPr sz="1500" b="0">
+                <a:solidFill>
+                  <a:srgbClr val="1A1A2E"/>
+                </a:solidFill>
+              </a:defRPr>
+            </a:pPr>
+            <a:r>
+              <a:t>  Full audit trail for regulatory compliance</a:t>
             </a:r>
           </a:p>
         </p:txBody>
@@ -4164,7 +4121,7 @@
     <p:bg>
       <p:bgPr>
         <a:solidFill>
-          <a:srgbClr val="1A1A2E"/>
+          <a:srgbClr val="266DF0"/>
         </a:solidFill>
         <a:effectLst/>
       </p:bgPr>
@@ -4178,31 +4135,14 @@
       <p:grpSpPr/>
       <p:sp>
         <p:nvSpPr>
-          <p:cNvPr id="2" name="Title 1"/>
-          <p:cNvSpPr>
-            <a:spLocks noGrp="1"/>
-          </p:cNvSpPr>
-          <p:nvPr>
-            <p:ph type="title"/>
-          </p:nvPr>
-        </p:nvSpPr>
-        <p:spPr/>
-        <p:txBody>
-          <a:bodyPr/>
-          <a:lstStyle/>
-          <a:p/>
-        </p:txBody>
-      </p:sp>
-      <p:sp>
-        <p:nvSpPr>
-          <p:cNvPr id="3" name="TextBox 2"/>
+          <p:cNvPr id="2" name="TextBox 1"/>
           <p:cNvSpPr txBox="1"/>
           <p:nvPr/>
         </p:nvSpPr>
         <p:spPr>
           <a:xfrm>
-            <a:off x="914400" y="2286000"/>
-            <a:ext cx="7315200" cy="914400"/>
+            <a:off x="914400" y="2560320"/>
+            <a:ext cx="7315200" cy="1371600"/>
           </a:xfrm>
           <a:prstGeom prst="rect">
             <a:avLst/>
@@ -4216,28 +4156,57 @@
           <a:lstStyle/>
           <a:p>
             <a:pPr algn="ctr">
-              <a:defRPr sz="4000" b="1">
+              <a:spcAft>
+                <a:spcPts val="1360"/>
+              </a:spcAft>
+              <a:defRPr sz="3400" b="1">
                 <a:solidFill>
                   <a:srgbClr val="FFFFFF"/>
                 </a:solidFill>
               </a:defRPr>
             </a:pPr>
             <a:r>
-              <a:t>Thank You</a:t>
-            </a:r>
-          </a:p>
-        </p:txBody>
-      </p:sp>
-      <p:sp>
-        <p:nvSpPr>
-          <p:cNvPr id="4" name="TextBox 3"/>
+              <a:t>Production &amp; MLOps</a:t>
+            </a:r>
+          </a:p>
+        </p:txBody>
+      </p:sp>
+    </p:spTree>
+  </p:cSld>
+  <p:clrMapOvr>
+    <a:masterClrMapping/>
+  </p:clrMapOvr>
+</p:sld>
+</file>
+
+<file path=ppt/slides/slide16.xml><?xml version="1.0" encoding="utf-8"?>
+<p:sld xmlns:a="http://schemas.openxmlformats.org/drawingml/2006/main" xmlns:p="http://schemas.openxmlformats.org/presentationml/2006/main" xmlns:r="http://schemas.openxmlformats.org/officeDocument/2006/relationships">
+  <p:cSld>
+    <p:bg>
+      <p:bgPr>
+        <a:solidFill>
+          <a:srgbClr val="FFFFFF"/>
+        </a:solidFill>
+        <a:effectLst/>
+      </p:bgPr>
+    </p:bg>
+    <p:spTree>
+      <p:nvGrpSpPr>
+        <p:cNvPr id="1" name=""/>
+        <p:cNvGrpSpPr/>
+        <p:nvPr/>
+      </p:nvGrpSpPr>
+      <p:grpSpPr/>
+      <p:sp>
+        <p:nvSpPr>
+          <p:cNvPr id="2" name="TextBox 1"/>
           <p:cNvSpPr txBox="1"/>
           <p:nvPr/>
         </p:nvSpPr>
         <p:spPr>
           <a:xfrm>
-            <a:off x="914400" y="3657600"/>
-            <a:ext cx="7315200" cy="914400"/>
+            <a:off x="548640" y="365760"/>
+            <a:ext cx="8046720" cy="731520"/>
           </a:xfrm>
           <a:prstGeom prst="rect">
             <a:avLst/>
@@ -4250,29 +4219,75 @@
           </a:bodyPr>
           <a:lstStyle/>
           <a:p>
-            <a:pPr algn="ctr">
-              <a:defRPr sz="2000" b="0">
-                <a:solidFill>
-                  <a:srgbClr val="FFFFFF"/>
-                </a:solidFill>
-              </a:defRPr>
-            </a:pPr>
-            <a:r>
-              <a:t>Questions &amp; Discussion</a:t>
-            </a:r>
-          </a:p>
-        </p:txBody>
-      </p:sp>
-      <p:sp>
-        <p:nvSpPr>
-          <p:cNvPr id="5" name="TextBox 4"/>
+            <a:pPr algn="l">
+              <a:spcAft>
+                <a:spcPts val="1040"/>
+              </a:spcAft>
+              <a:defRPr sz="2600" b="1">
+                <a:solidFill>
+                  <a:srgbClr val="1A1A2E"/>
+                </a:solidFill>
+              </a:defRPr>
+            </a:pPr>
+            <a:r>
+              <a:t>Deployed System</a:t>
+            </a:r>
+          </a:p>
+        </p:txBody>
+      </p:sp>
+      <p:sp>
+        <p:nvSpPr>
+          <p:cNvPr id="3" name="Rectangle 2"/>
+          <p:cNvSpPr/>
+          <p:nvPr/>
+        </p:nvSpPr>
+        <p:spPr>
+          <a:xfrm>
+            <a:off x="548640" y="1005840"/>
+            <a:ext cx="1828800" cy="38100"/>
+          </a:xfrm>
+          <a:prstGeom prst="rect">
+            <a:avLst/>
+          </a:prstGeom>
+          <a:solidFill>
+            <a:srgbClr val="266DF0"/>
+          </a:solidFill>
+          <a:ln>
+            <a:noFill/>
+          </a:ln>
+        </p:spPr>
+        <p:style>
+          <a:lnRef idx="1">
+            <a:schemeClr val="accent1"/>
+          </a:lnRef>
+          <a:fillRef idx="3">
+            <a:schemeClr val="accent1"/>
+          </a:fillRef>
+          <a:effectRef idx="2">
+            <a:schemeClr val="accent1"/>
+          </a:effectRef>
+          <a:fontRef idx="minor">
+            <a:schemeClr val="lt1"/>
+          </a:fontRef>
+        </p:style>
+        <p:txBody>
+          <a:bodyPr rtlCol="0" anchor="ctr"/>
+          <a:lstStyle/>
+          <a:p>
+            <a:pPr algn="ctr"/>
+          </a:p>
+        </p:txBody>
+      </p:sp>
+      <p:sp>
+        <p:nvSpPr>
+          <p:cNvPr id="4" name="TextBox 3"/>
           <p:cNvSpPr txBox="1"/>
           <p:nvPr/>
         </p:nvSpPr>
         <p:spPr>
           <a:xfrm>
-            <a:off x="914400" y="5029200"/>
-            <a:ext cx="7315200" cy="457200"/>
+            <a:off x="548640" y="1280160"/>
+            <a:ext cx="8046720" cy="4572000"/>
           </a:xfrm>
           <a:prstGeom prst="rect">
             <a:avLst/>
@@ -4285,10 +4300,617 @@
           </a:bodyPr>
           <a:lstStyle/>
           <a:p>
+            <a:pPr algn="l">
+              <a:spcAft>
+                <a:spcPts val="600"/>
+              </a:spcAft>
+              <a:defRPr sz="1500" b="0">
+                <a:solidFill>
+                  <a:srgbClr val="1A1A2E"/>
+                </a:solidFill>
+              </a:defRPr>
+            </a:pPr>
+            <a:r>
+              <a:t>  LIVE APP: Streamlit on Azure App Service</a:t>
+            </a:r>
+          </a:p>
+          <a:p>
+            <a:pPr algn="l">
+              <a:spcAft>
+                <a:spcPts val="600"/>
+              </a:spcAft>
+              <a:defRPr sz="1500" b="0">
+                <a:solidFill>
+                  <a:srgbClr val="1A1A2E"/>
+                </a:solidFill>
+              </a:defRPr>
+            </a:pPr>
+            <a:r>
+              <a:t>    → Enter FEI → get risk score + SHAP explanation</a:t>
+            </a:r>
+          </a:p>
+          <a:p>
+            <a:pPr algn="l">
+              <a:spcAft>
+                <a:spcPts val="600"/>
+              </a:spcAft>
+              <a:defRPr sz="1500" b="0">
+                <a:solidFill>
+                  <a:srgbClr val="1A1A2E"/>
+                </a:solidFill>
+              </a:defRPr>
+            </a:pPr>
+            <a:r>
+              <a:t>    → qualifyze-risk-xxx.azurewebsites.net</a:t>
+            </a:r>
+          </a:p>
+          <a:p>
+            <a:pPr algn="l">
+              <a:spcAft>
+                <a:spcPts val="600"/>
+              </a:spcAft>
+              <a:defRPr sz="1500" b="0">
+                <a:solidFill>
+                  <a:srgbClr val="1A1A2E"/>
+                </a:solidFill>
+              </a:defRPr>
+            </a:pPr>
+            <a:r>
+              <a:t>  </a:t>
+            </a:r>
+          </a:p>
+          <a:p>
+            <a:pPr algn="l">
+              <a:spcAft>
+                <a:spcPts val="600"/>
+              </a:spcAft>
+              <a:defRPr sz="1500" b="0">
+                <a:solidFill>
+                  <a:srgbClr val="1A1A2E"/>
+                </a:solidFill>
+              </a:defRPr>
+            </a:pPr>
+            <a:r>
+              <a:t>  CI/CD: GitHub Actions</a:t>
+            </a:r>
+          </a:p>
+          <a:p>
+            <a:pPr algn="l">
+              <a:spcAft>
+                <a:spcPts val="600"/>
+              </a:spcAft>
+              <a:defRPr sz="1500" b="0">
+                <a:solidFill>
+                  <a:srgbClr val="1A1A2E"/>
+                </a:solidFill>
+              </a:defRPr>
+            </a:pPr>
+            <a:r>
+              <a:t>    → PR → pytest → merge → tests pass → auto-deploy to Azure</a:t>
+            </a:r>
+          </a:p>
+          <a:p>
+            <a:pPr algn="l">
+              <a:spcAft>
+                <a:spcPts val="600"/>
+              </a:spcAft>
+              <a:defRPr sz="1500" b="0">
+                <a:solidFill>
+                  <a:srgbClr val="1A1A2E"/>
+                </a:solidFill>
+              </a:defRPr>
+            </a:pPr>
+            <a:r>
+              <a:t>    → Branch protection on main</a:t>
+            </a:r>
+          </a:p>
+          <a:p>
+            <a:pPr algn="l">
+              <a:spcAft>
+                <a:spcPts val="600"/>
+              </a:spcAft>
+              <a:defRPr sz="1500" b="0">
+                <a:solidFill>
+                  <a:srgbClr val="1A1A2E"/>
+                </a:solidFill>
+              </a:defRPr>
+            </a:pPr>
+            <a:r>
+              <a:t>  </a:t>
+            </a:r>
+          </a:p>
+          <a:p>
+            <a:pPr algn="l">
+              <a:spcAft>
+                <a:spcPts val="600"/>
+              </a:spcAft>
+              <a:defRPr sz="1500" b="0">
+                <a:solidFill>
+                  <a:srgbClr val="1A1A2E"/>
+                </a:solidFill>
+              </a:defRPr>
+            </a:pPr>
+            <a:r>
+              <a:t>  ORCHESTRATION: Airflow (4 DAGs, local demo)</a:t>
+            </a:r>
+          </a:p>
+          <a:p>
+            <a:pPr algn="l">
+              <a:spcAft>
+                <a:spcPts val="600"/>
+              </a:spcAft>
+              <a:defRPr sz="1500" b="0">
+                <a:solidFill>
+                  <a:srgbClr val="1A1A2E"/>
+                </a:solidFill>
+              </a:defRPr>
+            </a:pPr>
+            <a:r>
+              <a:t>    → Weekly data refresh, feature pipeline, monthly retrain, batch scoring</a:t>
+            </a:r>
+          </a:p>
+          <a:p>
+            <a:pPr algn="l">
+              <a:spcAft>
+                <a:spcPts val="600"/>
+              </a:spcAft>
+              <a:defRPr sz="1500" b="0">
+                <a:solidFill>
+                  <a:srgbClr val="1A1A2E"/>
+                </a:solidFill>
+              </a:defRPr>
+            </a:pPr>
+            <a:r>
+              <a:t>    → Champion/challenger model promotion pattern</a:t>
+            </a:r>
+          </a:p>
+          <a:p>
+            <a:pPr algn="l">
+              <a:spcAft>
+                <a:spcPts val="600"/>
+              </a:spcAft>
+              <a:defRPr sz="1500" b="0">
+                <a:solidFill>
+                  <a:srgbClr val="1A1A2E"/>
+                </a:solidFill>
+              </a:defRPr>
+            </a:pPr>
+            <a:r>
+              <a:t>  </a:t>
+            </a:r>
+          </a:p>
+          <a:p>
+            <a:pPr algn="l">
+              <a:spcAft>
+                <a:spcPts val="600"/>
+              </a:spcAft>
+              <a:defRPr sz="1500" b="0">
+                <a:solidFill>
+                  <a:srgbClr val="1A1A2E"/>
+                </a:solidFill>
+              </a:defRPr>
+            </a:pPr>
+            <a:r>
+              <a:t>  MONITORING: drift detection on score distribution (proposed)</a:t>
+            </a:r>
+          </a:p>
+        </p:txBody>
+      </p:sp>
+    </p:spTree>
+  </p:cSld>
+  <p:clrMapOvr>
+    <a:masterClrMapping/>
+  </p:clrMapOvr>
+</p:sld>
+</file>
+
+<file path=ppt/slides/slide17.xml><?xml version="1.0" encoding="utf-8"?>
+<p:sld xmlns:a="http://schemas.openxmlformats.org/drawingml/2006/main" xmlns:p="http://schemas.openxmlformats.org/presentationml/2006/main" xmlns:r="http://schemas.openxmlformats.org/officeDocument/2006/relationships">
+  <p:cSld>
+    <p:bg>
+      <p:bgPr>
+        <a:solidFill>
+          <a:srgbClr val="FFFFFF"/>
+        </a:solidFill>
+        <a:effectLst/>
+      </p:bgPr>
+    </p:bg>
+    <p:spTree>
+      <p:nvGrpSpPr>
+        <p:cNvPr id="1" name=""/>
+        <p:cNvGrpSpPr/>
+        <p:nvPr/>
+      </p:nvGrpSpPr>
+      <p:grpSpPr/>
+      <p:sp>
+        <p:nvSpPr>
+          <p:cNvPr id="2" name="TextBox 1"/>
+          <p:cNvSpPr txBox="1"/>
+          <p:nvPr/>
+        </p:nvSpPr>
+        <p:spPr>
+          <a:xfrm>
+            <a:off x="548640" y="365760"/>
+            <a:ext cx="8046720" cy="731520"/>
+          </a:xfrm>
+          <a:prstGeom prst="rect">
+            <a:avLst/>
+          </a:prstGeom>
+          <a:noFill/>
+        </p:spPr>
+        <p:txBody>
+          <a:bodyPr wrap="square">
+            <a:spAutoFit/>
+          </a:bodyPr>
+          <a:lstStyle/>
+          <a:p>
+            <a:pPr algn="l">
+              <a:spcAft>
+                <a:spcPts val="1040"/>
+              </a:spcAft>
+              <a:defRPr sz="2600" b="1">
+                <a:solidFill>
+                  <a:srgbClr val="1A1A2E"/>
+                </a:solidFill>
+              </a:defRPr>
+            </a:pPr>
+            <a:r>
+              <a:t>Limitations &amp; Next Steps</a:t>
+            </a:r>
+          </a:p>
+        </p:txBody>
+      </p:sp>
+      <p:sp>
+        <p:nvSpPr>
+          <p:cNvPr id="3" name="Rectangle 2"/>
+          <p:cNvSpPr/>
+          <p:nvPr/>
+        </p:nvSpPr>
+        <p:spPr>
+          <a:xfrm>
+            <a:off x="548640" y="1005840"/>
+            <a:ext cx="1828800" cy="38100"/>
+          </a:xfrm>
+          <a:prstGeom prst="rect">
+            <a:avLst/>
+          </a:prstGeom>
+          <a:solidFill>
+            <a:srgbClr val="266DF0"/>
+          </a:solidFill>
+          <a:ln>
+            <a:noFill/>
+          </a:ln>
+        </p:spPr>
+        <p:style>
+          <a:lnRef idx="1">
+            <a:schemeClr val="accent1"/>
+          </a:lnRef>
+          <a:fillRef idx="3">
+            <a:schemeClr val="accent1"/>
+          </a:fillRef>
+          <a:effectRef idx="2">
+            <a:schemeClr val="accent1"/>
+          </a:effectRef>
+          <a:fontRef idx="minor">
+            <a:schemeClr val="lt1"/>
+          </a:fontRef>
+        </p:style>
+        <p:txBody>
+          <a:bodyPr rtlCol="0" anchor="ctr"/>
+          <a:lstStyle/>
+          <a:p>
+            <a:pPr algn="ctr"/>
+          </a:p>
+        </p:txBody>
+      </p:sp>
+      <p:sp>
+        <p:nvSpPr>
+          <p:cNvPr id="4" name="TextBox 3"/>
+          <p:cNvSpPr txBox="1"/>
+          <p:nvPr/>
+        </p:nvSpPr>
+        <p:spPr>
+          <a:xfrm>
+            <a:off x="548640" y="1280160"/>
+            <a:ext cx="8046720" cy="4572000"/>
+          </a:xfrm>
+          <a:prstGeom prst="rect">
+            <a:avLst/>
+          </a:prstGeom>
+          <a:noFill/>
+        </p:spPr>
+        <p:txBody>
+          <a:bodyPr wrap="square">
+            <a:spAutoFit/>
+          </a:bodyPr>
+          <a:lstStyle/>
+          <a:p>
+            <a:pPr algn="l">
+              <a:spcAft>
+                <a:spcPts val="600"/>
+              </a:spcAft>
+              <a:defRPr sz="1500" b="0">
+                <a:solidFill>
+                  <a:srgbClr val="1A1A2E"/>
+                </a:solidFill>
+              </a:defRPr>
+            </a:pPr>
+            <a:r>
+              <a:t>  LIMITATIONS:</a:t>
+            </a:r>
+          </a:p>
+          <a:p>
+            <a:pPr algn="l">
+              <a:spcAft>
+                <a:spcPts val="600"/>
+              </a:spcAft>
+              <a:defRPr sz="1500" b="0">
+                <a:solidFill>
+                  <a:srgbClr val="1A1A2E"/>
+                </a:solidFill>
+              </a:defRPr>
+            </a:pPr>
+            <a:r>
+              <a:t>    • Cannot predict first-time offenders (no prior history)</a:t>
+            </a:r>
+          </a:p>
+          <a:p>
+            <a:pPr algn="l">
+              <a:spcAft>
+                <a:spcPts val="600"/>
+              </a:spcAft>
+              <a:defRPr sz="1500" b="0">
+                <a:solidFill>
+                  <a:srgbClr val="1A1A2E"/>
+                </a:solidFill>
+              </a:defRPr>
+            </a:pPr>
+            <a:r>
+              <a:t>    • FDA inspection database is not comprehensive</a:t>
+            </a:r>
+          </a:p>
+          <a:p>
+            <a:pPr algn="l">
+              <a:spcAft>
+                <a:spcPts val="600"/>
+              </a:spcAft>
+              <a:defRPr sz="1500" b="0">
+                <a:solidFill>
+                  <a:srgbClr val="1A1A2E"/>
+                </a:solidFill>
+              </a:defRPr>
+            </a:pPr>
+            <a:r>
+              <a:t>    • Entity matching has noise for ~45% of warning letters</a:t>
+            </a:r>
+          </a:p>
+          <a:p>
+            <a:pPr algn="l">
+              <a:spcAft>
+                <a:spcPts val="600"/>
+              </a:spcAft>
+              <a:defRPr sz="1500" b="0">
+                <a:solidFill>
+                  <a:srgbClr val="1A1A2E"/>
+                </a:solidFill>
+              </a:defRPr>
+            </a:pPr>
+            <a:r>
+              <a:t>    • ROC-AUC 0.87 is likely the ceiling with public data alone</a:t>
+            </a:r>
+          </a:p>
+          <a:p>
+            <a:pPr algn="l">
+              <a:spcAft>
+                <a:spcPts val="600"/>
+              </a:spcAft>
+              <a:defRPr sz="1500" b="0">
+                <a:solidFill>
+                  <a:srgbClr val="1A1A2E"/>
+                </a:solidFill>
+              </a:defRPr>
+            </a:pPr>
+            <a:r>
+              <a:t>  </a:t>
+            </a:r>
+          </a:p>
+          <a:p>
+            <a:pPr algn="l">
+              <a:spcAft>
+                <a:spcPts val="600"/>
+              </a:spcAft>
+              <a:defRPr sz="1500" b="0">
+                <a:solidFill>
+                  <a:srgbClr val="1A1A2E"/>
+                </a:solidFill>
+              </a:defRPr>
+            </a:pPr>
+            <a:r>
+              <a:t>  HIGHEST-VALUE NEXT STEPS:</a:t>
+            </a:r>
+          </a:p>
+          <a:p>
+            <a:pPr algn="l">
+              <a:spcAft>
+                <a:spcPts val="600"/>
+              </a:spcAft>
+              <a:defRPr sz="1500" b="0">
+                <a:solidFill>
+                  <a:srgbClr val="1A1A2E"/>
+                </a:solidFill>
+              </a:defRPr>
+            </a:pPr>
+            <a:r>
+              <a:t>    1. Integrate Qualifyze private audit data (biggest lift for first-offenders)</a:t>
+            </a:r>
+          </a:p>
+          <a:p>
+            <a:pPr algn="l">
+              <a:spcAft>
+                <a:spcPts val="600"/>
+              </a:spcAft>
+              <a:defRPr sz="1500" b="0">
+                <a:solidFill>
+                  <a:srgbClr val="1A1A2E"/>
+                </a:solidFill>
+              </a:defRPr>
+            </a:pPr>
+            <a:r>
+              <a:t>    2. NLP on citation text (severity categorization beyond CFR codes)</a:t>
+            </a:r>
+          </a:p>
+          <a:p>
+            <a:pPr algn="l">
+              <a:spcAft>
+                <a:spcPts val="600"/>
+              </a:spcAft>
+              <a:defRPr sz="1500" b="0">
+                <a:solidFill>
+                  <a:srgbClr val="1A1A2E"/>
+                </a:solidFill>
+              </a:defRPr>
+            </a:pPr>
+            <a:r>
+              <a:t>    3. Survival analysis (time-to-next-OAI, not just binary)</a:t>
+            </a:r>
+          </a:p>
+          <a:p>
+            <a:pPr algn="l">
+              <a:spcAft>
+                <a:spcPts val="600"/>
+              </a:spcAft>
+              <a:defRPr sz="1500" b="0">
+                <a:solidFill>
+                  <a:srgbClr val="1A1A2E"/>
+                </a:solidFill>
+              </a:defRPr>
+            </a:pPr>
+            <a:r>
+              <a:t>    4. Active learning from analyst feedback on flagged suppliers</a:t>
+            </a:r>
+          </a:p>
+        </p:txBody>
+      </p:sp>
+    </p:spTree>
+  </p:cSld>
+  <p:clrMapOvr>
+    <a:masterClrMapping/>
+  </p:clrMapOvr>
+</p:sld>
+</file>
+
+<file path=ppt/slides/slide18.xml><?xml version="1.0" encoding="utf-8"?>
+<p:sld xmlns:a="http://schemas.openxmlformats.org/drawingml/2006/main" xmlns:p="http://schemas.openxmlformats.org/presentationml/2006/main" xmlns:r="http://schemas.openxmlformats.org/officeDocument/2006/relationships">
+  <p:cSld>
+    <p:bg>
+      <p:bgPr>
+        <a:solidFill>
+          <a:srgbClr val="0F172A"/>
+        </a:solidFill>
+        <a:effectLst/>
+      </p:bgPr>
+    </p:bg>
+    <p:spTree>
+      <p:nvGrpSpPr>
+        <p:cNvPr id="1" name=""/>
+        <p:cNvGrpSpPr/>
+        <p:nvPr/>
+      </p:nvGrpSpPr>
+      <p:grpSpPr/>
+      <p:sp>
+        <p:nvSpPr>
+          <p:cNvPr id="2" name="TextBox 1"/>
+          <p:cNvSpPr txBox="1"/>
+          <p:nvPr/>
+        </p:nvSpPr>
+        <p:spPr>
+          <a:xfrm>
+            <a:off x="914400" y="2011680"/>
+            <a:ext cx="7315200" cy="1371600"/>
+          </a:xfrm>
+          <a:prstGeom prst="rect">
+            <a:avLst/>
+          </a:prstGeom>
+          <a:noFill/>
+        </p:spPr>
+        <p:txBody>
+          <a:bodyPr wrap="square">
+            <a:spAutoFit/>
+          </a:bodyPr>
+          <a:lstStyle/>
+          <a:p>
             <a:pPr algn="ctr">
-              <a:defRPr sz="1400" b="0">
+              <a:spcAft>
+                <a:spcPts val="1520"/>
+              </a:spcAft>
+              <a:defRPr sz="3800" b="1">
                 <a:solidFill>
                   <a:srgbClr val="FFFFFF"/>
+                </a:solidFill>
+              </a:defRPr>
+            </a:pPr>
+            <a:r>
+              <a:t>Thank You</a:t>
+            </a:r>
+          </a:p>
+        </p:txBody>
+      </p:sp>
+      <p:sp>
+        <p:nvSpPr>
+          <p:cNvPr id="3" name="TextBox 2"/>
+          <p:cNvSpPr txBox="1"/>
+          <p:nvPr/>
+        </p:nvSpPr>
+        <p:spPr>
+          <a:xfrm>
+            <a:off x="914400" y="3474720"/>
+            <a:ext cx="7315200" cy="914400"/>
+          </a:xfrm>
+          <a:prstGeom prst="rect">
+            <a:avLst/>
+          </a:prstGeom>
+          <a:noFill/>
+        </p:spPr>
+        <p:txBody>
+          <a:bodyPr wrap="square">
+            <a:spAutoFit/>
+          </a:bodyPr>
+          <a:lstStyle/>
+          <a:p>
+            <a:pPr algn="ctr">
+              <a:spcAft>
+                <a:spcPts val="640"/>
+              </a:spcAft>
+              <a:defRPr sz="1600" b="0">
+                <a:solidFill>
+                  <a:srgbClr val="CCCCDD"/>
+                </a:solidFill>
+              </a:defRPr>
+            </a:pPr>
+            <a:r>
+              <a:t>Questions &amp; Discussion</a:t>
+            </a:r>
+          </a:p>
+          <a:p>
+            <a:pPr algn="ctr">
+              <a:spcAft>
+                <a:spcPts val="640"/>
+              </a:spcAft>
+              <a:defRPr sz="1600" b="0">
+                <a:solidFill>
+                  <a:srgbClr val="CCCCDD"/>
+                </a:solidFill>
+              </a:defRPr>
+            </a:pPr>
+          </a:p>
+          <a:p>
+            <a:pPr algn="ctr">
+              <a:spcAft>
+                <a:spcPts val="640"/>
+              </a:spcAft>
+              <a:defRPr sz="1600" b="0">
+                <a:solidFill>
+                  <a:srgbClr val="CCCCDD"/>
                 </a:solidFill>
               </a:defRPr>
             </a:pPr>
@@ -4309,6 +4931,14 @@
 <file path=ppt/slides/slide2.xml><?xml version="1.0" encoding="utf-8"?>
 <p:sld xmlns:a="http://schemas.openxmlformats.org/drawingml/2006/main" xmlns:p="http://schemas.openxmlformats.org/presentationml/2006/main" xmlns:r="http://schemas.openxmlformats.org/officeDocument/2006/relationships">
   <p:cSld>
+    <p:bg>
+      <p:bgPr>
+        <a:solidFill>
+          <a:srgbClr val="FFFFFF"/>
+        </a:solidFill>
+        <a:effectLst/>
+      </p:bgPr>
+    </p:bg>
     <p:spTree>
       <p:nvGrpSpPr>
         <p:cNvPr id="1" name=""/>
@@ -4318,21 +4948,31 @@
       <p:grpSpPr/>
       <p:sp>
         <p:nvSpPr>
-          <p:cNvPr id="2" name="Title 1"/>
-          <p:cNvSpPr>
-            <a:spLocks noGrp="1"/>
-          </p:cNvSpPr>
-          <p:nvPr>
-            <p:ph type="title"/>
-          </p:nvPr>
-        </p:nvSpPr>
-        <p:spPr/>
-        <p:txBody>
-          <a:bodyPr/>
-          <a:lstStyle/>
-          <a:p>
-            <a:pPr>
-              <a:defRPr sz="2800">
+          <p:cNvPr id="2" name="TextBox 1"/>
+          <p:cNvSpPr txBox="1"/>
+          <p:nvPr/>
+        </p:nvSpPr>
+        <p:spPr>
+          <a:xfrm>
+            <a:off x="548640" y="365760"/>
+            <a:ext cx="8046720" cy="731520"/>
+          </a:xfrm>
+          <a:prstGeom prst="rect">
+            <a:avLst/>
+          </a:prstGeom>
+          <a:noFill/>
+        </p:spPr>
+        <p:txBody>
+          <a:bodyPr wrap="square">
+            <a:spAutoFit/>
+          </a:bodyPr>
+          <a:lstStyle/>
+          <a:p>
+            <a:pPr algn="l">
+              <a:spcAft>
+                <a:spcPts val="1040"/>
+              </a:spcAft>
+              <a:defRPr sz="2600" b="1">
                 <a:solidFill>
                   <a:srgbClr val="1A1A2E"/>
                 </a:solidFill>
@@ -4346,106 +4986,171 @@
       </p:sp>
       <p:sp>
         <p:nvSpPr>
-          <p:cNvPr id="3" name="Content Placeholder 2"/>
-          <p:cNvSpPr>
-            <a:spLocks noGrp="1"/>
-          </p:cNvSpPr>
-          <p:nvPr>
-            <p:ph idx="1"/>
-          </p:nvPr>
-        </p:nvSpPr>
-        <p:spPr/>
-        <p:txBody>
-          <a:bodyPr/>
-          <a:lstStyle/>
-          <a:p>
-            <a:pPr>
-              <a:spcAft>
-                <a:spcPts val="1200"/>
-              </a:spcAft>
-              <a:defRPr sz="1400">
-                <a:solidFill>
-                  <a:srgbClr val="1654CC"/>
-                </a:solidFill>
-              </a:defRPr>
-            </a:pPr>
-            <a:r>
-              <a:t>Supply chain risk management requires early warning signals</a:t>
-            </a:r>
-          </a:p>
-          <a:p>
-            <a:pPr>
-              <a:spcAft>
-                <a:spcPts val="800"/>
-              </a:spcAft>
-              <a:defRPr sz="1600">
-                <a:solidFill>
-                  <a:srgbClr val="1A1A2E"/>
-                </a:solidFill>
-              </a:defRPr>
-            </a:pPr>
-            <a:r>
-              <a:t>Qualifyze needs to assess supplier risk before issues occur</a:t>
-            </a:r>
-          </a:p>
-          <a:p>
-            <a:pPr>
-              <a:spcAft>
-                <a:spcPts val="800"/>
-              </a:spcAft>
-              <a:defRPr sz="1600">
-                <a:solidFill>
-                  <a:srgbClr val="1A1A2E"/>
-                </a:solidFill>
-              </a:defRPr>
-            </a:pPr>
-            <a:r>
-              <a:t>FDA inspects facilities and classifies outcomes: NAI → VAI → OAI</a:t>
-            </a:r>
-          </a:p>
-          <a:p>
-            <a:pPr>
-              <a:spcAft>
-                <a:spcPts val="800"/>
-              </a:spcAft>
-              <a:defRPr sz="1600">
-                <a:solidFill>
-                  <a:srgbClr val="1A1A2E"/>
-                </a:solidFill>
-              </a:defRPr>
-            </a:pPr>
-            <a:r>
-              <a:t>OAI (Official Action Indicated) = serious compliance failure</a:t>
-            </a:r>
-          </a:p>
-          <a:p>
-            <a:pPr>
-              <a:spcAft>
-                <a:spcPts val="800"/>
-              </a:spcAft>
-              <a:defRPr sz="1600">
-                <a:solidFill>
-                  <a:srgbClr val="1A1A2E"/>
-                </a:solidFill>
-              </a:defRPr>
-            </a:pPr>
-            <a:r>
-              <a:t>Only ~5% of inspections result in OAI — rare but high impact</a:t>
-            </a:r>
-          </a:p>
-          <a:p>
-            <a:pPr>
-              <a:spcAft>
-                <a:spcPts val="800"/>
-              </a:spcAft>
-              <a:defRPr sz="1600">
-                <a:solidFill>
-                  <a:srgbClr val="1A1A2E"/>
-                </a:solidFill>
-              </a:defRPr>
-            </a:pPr>
-            <a:r>
-              <a:t>Goal: predict which facilities will receive OAI on their next inspection</a:t>
+          <p:cNvPr id="3" name="Rectangle 2"/>
+          <p:cNvSpPr/>
+          <p:nvPr/>
+        </p:nvSpPr>
+        <p:spPr>
+          <a:xfrm>
+            <a:off x="548640" y="1005840"/>
+            <a:ext cx="1828800" cy="38100"/>
+          </a:xfrm>
+          <a:prstGeom prst="rect">
+            <a:avLst/>
+          </a:prstGeom>
+          <a:solidFill>
+            <a:srgbClr val="266DF0"/>
+          </a:solidFill>
+          <a:ln>
+            <a:noFill/>
+          </a:ln>
+        </p:spPr>
+        <p:style>
+          <a:lnRef idx="1">
+            <a:schemeClr val="accent1"/>
+          </a:lnRef>
+          <a:fillRef idx="3">
+            <a:schemeClr val="accent1"/>
+          </a:fillRef>
+          <a:effectRef idx="2">
+            <a:schemeClr val="accent1"/>
+          </a:effectRef>
+          <a:fontRef idx="minor">
+            <a:schemeClr val="lt1"/>
+          </a:fontRef>
+        </p:style>
+        <p:txBody>
+          <a:bodyPr rtlCol="0" anchor="ctr"/>
+          <a:lstStyle/>
+          <a:p>
+            <a:pPr algn="ctr"/>
+          </a:p>
+        </p:txBody>
+      </p:sp>
+      <p:sp>
+        <p:nvSpPr>
+          <p:cNvPr id="4" name="TextBox 3"/>
+          <p:cNvSpPr txBox="1"/>
+          <p:nvPr/>
+        </p:nvSpPr>
+        <p:spPr>
+          <a:xfrm>
+            <a:off x="548640" y="1280160"/>
+            <a:ext cx="8046720" cy="4572000"/>
+          </a:xfrm>
+          <a:prstGeom prst="rect">
+            <a:avLst/>
+          </a:prstGeom>
+          <a:noFill/>
+        </p:spPr>
+        <p:txBody>
+          <a:bodyPr wrap="square">
+            <a:spAutoFit/>
+          </a:bodyPr>
+          <a:lstStyle/>
+          <a:p>
+            <a:pPr algn="l">
+              <a:spcAft>
+                <a:spcPts val="600"/>
+              </a:spcAft>
+              <a:defRPr sz="1500" b="0">
+                <a:solidFill>
+                  <a:srgbClr val="1A1A2E"/>
+                </a:solidFill>
+              </a:defRPr>
+            </a:pPr>
+            <a:r>
+              <a:t>  Qualifyze evaluates suppliers for pharma/device companies</a:t>
+            </a:r>
+          </a:p>
+          <a:p>
+            <a:pPr algn="l">
+              <a:spcAft>
+                <a:spcPts val="600"/>
+              </a:spcAft>
+              <a:defRPr sz="1500" b="0">
+                <a:solidFill>
+                  <a:srgbClr val="1A1A2E"/>
+                </a:solidFill>
+              </a:defRPr>
+            </a:pPr>
+            <a:r>
+              <a:t>  FDA inspects facilities → classifies as NAI (ok) / VAI (minor) / OAI (serious)</a:t>
+            </a:r>
+          </a:p>
+          <a:p>
+            <a:pPr algn="l">
+              <a:spcAft>
+                <a:spcPts val="600"/>
+              </a:spcAft>
+              <a:defRPr sz="1500" b="0">
+                <a:solidFill>
+                  <a:srgbClr val="1A1A2E"/>
+                </a:solidFill>
+              </a:defRPr>
+            </a:pPr>
+            <a:r>
+              <a:t>  OAI = enforcement actions, warning letters, recalls</a:t>
+            </a:r>
+          </a:p>
+          <a:p>
+            <a:pPr algn="l">
+              <a:spcAft>
+                <a:spcPts val="600"/>
+              </a:spcAft>
+              <a:defRPr sz="1500" b="0">
+                <a:solidFill>
+                  <a:srgbClr val="1A1A2E"/>
+                </a:solidFill>
+              </a:defRPr>
+            </a:pPr>
+            <a:r>
+              <a:t>  Only ~5% of inspections result in OAI — rare but very costly</a:t>
+            </a:r>
+          </a:p>
+          <a:p>
+            <a:pPr algn="l">
+              <a:spcAft>
+                <a:spcPts val="600"/>
+              </a:spcAft>
+              <a:defRPr sz="1500" b="0">
+                <a:solidFill>
+                  <a:srgbClr val="1A1A2E"/>
+                </a:solidFill>
+              </a:defRPr>
+            </a:pPr>
+            <a:r>
+              <a:t>  </a:t>
+            </a:r>
+          </a:p>
+          <a:p>
+            <a:pPr algn="l">
+              <a:spcAft>
+                <a:spcPts val="600"/>
+              </a:spcAft>
+              <a:defRPr sz="1500" b="0">
+                <a:solidFill>
+                  <a:srgbClr val="1A1A2E"/>
+                </a:solidFill>
+              </a:defRPr>
+            </a:pPr>
+            <a:r>
+              <a:t>  GOAL: Predict which suppliers will get OAI before it happens</a:t>
+            </a:r>
+          </a:p>
+          <a:p>
+            <a:pPr algn="l">
+              <a:spcAft>
+                <a:spcPts val="600"/>
+              </a:spcAft>
+              <a:defRPr sz="1500" b="0">
+                <a:solidFill>
+                  <a:srgbClr val="1A1A2E"/>
+                </a:solidFill>
+              </a:defRPr>
+            </a:pPr>
+            <a:r>
+              <a:t>  → Enable proactive risk management instead of reactive response</a:t>
             </a:r>
           </a:p>
         </p:txBody>
@@ -4461,6 +5166,14 @@
 <file path=ppt/slides/slide3.xml><?xml version="1.0" encoding="utf-8"?>
 <p:sld xmlns:a="http://schemas.openxmlformats.org/drawingml/2006/main" xmlns:p="http://schemas.openxmlformats.org/presentationml/2006/main" xmlns:r="http://schemas.openxmlformats.org/officeDocument/2006/relationships">
   <p:cSld>
+    <p:bg>
+      <p:bgPr>
+        <a:solidFill>
+          <a:srgbClr val="266DF0"/>
+        </a:solidFill>
+        <a:effectLst/>
+      </p:bgPr>
+    </p:bg>
     <p:spTree>
       <p:nvGrpSpPr>
         <p:cNvPr id="1" name=""/>
@@ -4470,134 +5183,38 @@
       <p:grpSpPr/>
       <p:sp>
         <p:nvSpPr>
-          <p:cNvPr id="2" name="Title 1"/>
-          <p:cNvSpPr>
-            <a:spLocks noGrp="1"/>
-          </p:cNvSpPr>
-          <p:nvPr>
-            <p:ph type="title"/>
-          </p:nvPr>
-        </p:nvSpPr>
-        <p:spPr/>
-        <p:txBody>
-          <a:bodyPr/>
-          <a:lstStyle/>
-          <a:p>
-            <a:pPr>
-              <a:defRPr sz="2800">
-                <a:solidFill>
-                  <a:srgbClr val="1A1A2E"/>
-                </a:solidFill>
-              </a:defRPr>
-            </a:pPr>
-            <a:r>
-              <a:t>Data Sources</a:t>
-            </a:r>
-          </a:p>
-        </p:txBody>
-      </p:sp>
-      <p:sp>
-        <p:nvSpPr>
-          <p:cNvPr id="3" name="Content Placeholder 2"/>
-          <p:cNvSpPr>
-            <a:spLocks noGrp="1"/>
-          </p:cNvSpPr>
-          <p:nvPr>
-            <p:ph idx="1"/>
-          </p:nvPr>
-        </p:nvSpPr>
-        <p:spPr/>
-        <p:txBody>
-          <a:bodyPr/>
-          <a:lstStyle/>
-          <a:p>
-            <a:pPr>
-              <a:spcAft>
-                <a:spcPts val="1200"/>
-              </a:spcAft>
-              <a:defRPr sz="1400">
-                <a:solidFill>
-                  <a:srgbClr val="1654CC"/>
-                </a:solidFill>
-              </a:defRPr>
-            </a:pPr>
-            <a:r>
-              <a:t>5 public FDA datasets integrated via FEI Number + entity matching</a:t>
-            </a:r>
-          </a:p>
-          <a:p>
-            <a:pPr>
-              <a:spcAft>
-                <a:spcPts val="800"/>
-              </a:spcAft>
-              <a:defRPr sz="1600">
-                <a:solidFill>
-                  <a:srgbClr val="1A1A2E"/>
-                </a:solidFill>
-              </a:defRPr>
-            </a:pPr>
-            <a:r>
-              <a:t>Inspection Classifications — 337K inspections with NAI/VAI/OAI outcomes</a:t>
-            </a:r>
-          </a:p>
-          <a:p>
-            <a:pPr>
-              <a:spcAft>
-                <a:spcPts val="800"/>
-              </a:spcAft>
-              <a:defRPr sz="1600">
-                <a:solidFill>
-                  <a:srgbClr val="1A1A2E"/>
-                </a:solidFill>
-              </a:defRPr>
-            </a:pPr>
-            <a:r>
-              <a:t>Citations — 277K regulatory violations (specific CFR codes)</a:t>
-            </a:r>
-          </a:p>
-          <a:p>
-            <a:pPr>
-              <a:spcAft>
-                <a:spcPts val="800"/>
-              </a:spcAft>
-              <a:defRPr sz="1600">
-                <a:solidFill>
-                  <a:srgbClr val="1A1A2E"/>
-                </a:solidFill>
-              </a:defRPr>
-            </a:pPr>
-            <a:r>
-              <a:t>Warning Letters — 3,608 formal enforcement notices</a:t>
-            </a:r>
-          </a:p>
-          <a:p>
-            <a:pPr>
-              <a:spcAft>
-                <a:spcPts val="800"/>
-              </a:spcAft>
-              <a:defRPr sz="1600">
-                <a:solidFill>
-                  <a:srgbClr val="1A1A2E"/>
-                </a:solidFill>
-              </a:defRPr>
-            </a:pPr>
-            <a:r>
-              <a:t>Enforcement/Recalls — 57K product recalls (Class I/II/III)</a:t>
-            </a:r>
-          </a:p>
-          <a:p>
-            <a:pPr>
-              <a:spcAft>
-                <a:spcPts val="800"/>
-              </a:spcAft>
-              <a:defRPr sz="1600">
-                <a:solidFill>
-                  <a:srgbClr val="1A1A2E"/>
-                </a:solidFill>
-              </a:defRPr>
-            </a:pPr>
-            <a:r>
-              <a:t>Published Form 483s — 1,973 inspection observation documents</a:t>
+          <p:cNvPr id="2" name="TextBox 1"/>
+          <p:cNvSpPr txBox="1"/>
+          <p:nvPr/>
+        </p:nvSpPr>
+        <p:spPr>
+          <a:xfrm>
+            <a:off x="914400" y="2560320"/>
+            <a:ext cx="7315200" cy="1371600"/>
+          </a:xfrm>
+          <a:prstGeom prst="rect">
+            <a:avLst/>
+          </a:prstGeom>
+          <a:noFill/>
+        </p:spPr>
+        <p:txBody>
+          <a:bodyPr wrap="square">
+            <a:spAutoFit/>
+          </a:bodyPr>
+          <a:lstStyle/>
+          <a:p>
+            <a:pPr algn="ctr">
+              <a:spcAft>
+                <a:spcPts val="1360"/>
+              </a:spcAft>
+              <a:defRPr sz="3400" b="1">
+                <a:solidFill>
+                  <a:srgbClr val="FFFFFF"/>
+                </a:solidFill>
+              </a:defRPr>
+            </a:pPr>
+            <a:r>
+              <a:t>Data &amp; Processing</a:t>
             </a:r>
           </a:p>
         </p:txBody>
@@ -4613,6 +5230,14 @@
 <file path=ppt/slides/slide4.xml><?xml version="1.0" encoding="utf-8"?>
 <p:sld xmlns:a="http://schemas.openxmlformats.org/drawingml/2006/main" xmlns:p="http://schemas.openxmlformats.org/presentationml/2006/main" xmlns:r="http://schemas.openxmlformats.org/officeDocument/2006/relationships">
   <p:cSld>
+    <p:bg>
+      <p:bgPr>
+        <a:solidFill>
+          <a:srgbClr val="FFFFFF"/>
+        </a:solidFill>
+        <a:effectLst/>
+      </p:bgPr>
+    </p:bg>
     <p:spTree>
       <p:nvGrpSpPr>
         <p:cNvPr id="1" name=""/>
@@ -4622,134 +5247,262 @@
       <p:grpSpPr/>
       <p:sp>
         <p:nvSpPr>
-          <p:cNvPr id="2" name="Title 1"/>
-          <p:cNvSpPr>
-            <a:spLocks noGrp="1"/>
-          </p:cNvSpPr>
-          <p:nvPr>
-            <p:ph type="title"/>
-          </p:nvPr>
-        </p:nvSpPr>
-        <p:spPr/>
-        <p:txBody>
-          <a:bodyPr/>
-          <a:lstStyle/>
-          <a:p>
-            <a:pPr>
-              <a:defRPr sz="2800">
-                <a:solidFill>
-                  <a:srgbClr val="1A1A2E"/>
-                </a:solidFill>
-              </a:defRPr>
-            </a:pPr>
-            <a:r>
-              <a:t>End-to-End Pipeline</a:t>
-            </a:r>
-          </a:p>
-        </p:txBody>
-      </p:sp>
-      <p:sp>
-        <p:nvSpPr>
-          <p:cNvPr id="3" name="Content Placeholder 2"/>
-          <p:cNvSpPr>
-            <a:spLocks noGrp="1"/>
-          </p:cNvSpPr>
-          <p:nvPr>
-            <p:ph idx="1"/>
-          </p:nvPr>
-        </p:nvSpPr>
-        <p:spPr/>
-        <p:txBody>
-          <a:bodyPr/>
-          <a:lstStyle/>
-          <a:p>
-            <a:pPr>
-              <a:spcAft>
-                <a:spcPts val="800"/>
-              </a:spcAft>
-              <a:defRPr sz="1600">
-                <a:solidFill>
-                  <a:srgbClr val="1A1A2E"/>
-                </a:solidFill>
-              </a:defRPr>
-            </a:pPr>
-            <a:r>
-              <a:t>1. Data Ingestion — API scraping + bulk downloads (automated scripts)</a:t>
-            </a:r>
-          </a:p>
-          <a:p>
-            <a:pPr>
-              <a:spcAft>
-                <a:spcPts val="800"/>
-              </a:spcAft>
-              <a:defRPr sz="1600">
-                <a:solidFill>
-                  <a:srgbClr val="1A1A2E"/>
-                </a:solidFill>
-              </a:defRPr>
-            </a:pPr>
-            <a:r>
-              <a:t>2. Entity Resolution — TF-IDF fuzzy matching (0.8 threshold)</a:t>
-            </a:r>
-          </a:p>
-          <a:p>
-            <a:pPr>
-              <a:spcAft>
-                <a:spcPts val="800"/>
-              </a:spcAft>
-              <a:defRPr sz="1600">
-                <a:solidFill>
-                  <a:srgbClr val="1A1A2E"/>
-                </a:solidFill>
-              </a:defRPr>
-            </a:pPr>
-            <a:r>
-              <a:t>3. Feature Engineering — 22 temporal features per inspection</a:t>
-            </a:r>
-          </a:p>
-          <a:p>
-            <a:pPr>
-              <a:spcAft>
-                <a:spcPts val="800"/>
-              </a:spcAft>
-              <a:defRPr sz="1600">
-                <a:solidFill>
-                  <a:srgbClr val="1A1A2E"/>
-                </a:solidFill>
-              </a:defRPr>
-            </a:pPr>
-            <a:r>
-              <a:t>4. Modeling — Logistic Regression + XGBoost (with hyperparameter tuning)</a:t>
-            </a:r>
-          </a:p>
-          <a:p>
-            <a:pPr>
-              <a:spcAft>
-                <a:spcPts val="800"/>
-              </a:spcAft>
-              <a:defRPr sz="1600">
-                <a:solidFill>
-                  <a:srgbClr val="1A1A2E"/>
-                </a:solidFill>
-              </a:defRPr>
-            </a:pPr>
-            <a:r>
-              <a:t>5. Interpretability — SHAP explanations for every prediction</a:t>
-            </a:r>
-          </a:p>
-          <a:p>
-            <a:pPr>
-              <a:spcAft>
-                <a:spcPts val="800"/>
-              </a:spcAft>
-              <a:defRPr sz="1600">
-                <a:solidFill>
-                  <a:srgbClr val="1A1A2E"/>
-                </a:solidFill>
-              </a:defRPr>
-            </a:pPr>
-            <a:r>
-              <a:t>6. Orchestration — Airflow DAGs for production automation</a:t>
+          <p:cNvPr id="2" name="TextBox 1"/>
+          <p:cNvSpPr txBox="1"/>
+          <p:nvPr/>
+        </p:nvSpPr>
+        <p:spPr>
+          <a:xfrm>
+            <a:off x="548640" y="365760"/>
+            <a:ext cx="8046720" cy="731520"/>
+          </a:xfrm>
+          <a:prstGeom prst="rect">
+            <a:avLst/>
+          </a:prstGeom>
+          <a:noFill/>
+        </p:spPr>
+        <p:txBody>
+          <a:bodyPr wrap="square">
+            <a:spAutoFit/>
+          </a:bodyPr>
+          <a:lstStyle/>
+          <a:p>
+            <a:pPr algn="l">
+              <a:spcAft>
+                <a:spcPts val="1040"/>
+              </a:spcAft>
+              <a:defRPr sz="2600" b="1">
+                <a:solidFill>
+                  <a:srgbClr val="1A1A2E"/>
+                </a:solidFill>
+              </a:defRPr>
+            </a:pPr>
+            <a:r>
+              <a:t>Data Sources (all public FDA)</a:t>
+            </a:r>
+          </a:p>
+        </p:txBody>
+      </p:sp>
+      <p:sp>
+        <p:nvSpPr>
+          <p:cNvPr id="3" name="Rectangle 2"/>
+          <p:cNvSpPr/>
+          <p:nvPr/>
+        </p:nvSpPr>
+        <p:spPr>
+          <a:xfrm>
+            <a:off x="548640" y="1005840"/>
+            <a:ext cx="1828800" cy="38100"/>
+          </a:xfrm>
+          <a:prstGeom prst="rect">
+            <a:avLst/>
+          </a:prstGeom>
+          <a:solidFill>
+            <a:srgbClr val="266DF0"/>
+          </a:solidFill>
+          <a:ln>
+            <a:noFill/>
+          </a:ln>
+        </p:spPr>
+        <p:style>
+          <a:lnRef idx="1">
+            <a:schemeClr val="accent1"/>
+          </a:lnRef>
+          <a:fillRef idx="3">
+            <a:schemeClr val="accent1"/>
+          </a:fillRef>
+          <a:effectRef idx="2">
+            <a:schemeClr val="accent1"/>
+          </a:effectRef>
+          <a:fontRef idx="minor">
+            <a:schemeClr val="lt1"/>
+          </a:fontRef>
+        </p:style>
+        <p:txBody>
+          <a:bodyPr rtlCol="0" anchor="ctr"/>
+          <a:lstStyle/>
+          <a:p>
+            <a:pPr algn="ctr"/>
+          </a:p>
+        </p:txBody>
+      </p:sp>
+      <p:sp>
+        <p:nvSpPr>
+          <p:cNvPr id="4" name="TextBox 3"/>
+          <p:cNvSpPr txBox="1"/>
+          <p:nvPr/>
+        </p:nvSpPr>
+        <p:spPr>
+          <a:xfrm>
+            <a:off x="548640" y="1280160"/>
+            <a:ext cx="8046720" cy="4572000"/>
+          </a:xfrm>
+          <a:prstGeom prst="rect">
+            <a:avLst/>
+          </a:prstGeom>
+          <a:noFill/>
+        </p:spPr>
+        <p:txBody>
+          <a:bodyPr wrap="square">
+            <a:spAutoFit/>
+          </a:bodyPr>
+          <a:lstStyle/>
+          <a:p>
+            <a:pPr algn="l">
+              <a:spcAft>
+                <a:spcPts val="600"/>
+              </a:spcAft>
+              <a:defRPr sz="1500" b="0">
+                <a:solidFill>
+                  <a:srgbClr val="1A1A2E"/>
+                </a:solidFill>
+              </a:defRPr>
+            </a:pPr>
+            <a:r>
+              <a:t>  Inspection Classifications    337K records   NAI/VAI/OAI per facility</a:t>
+            </a:r>
+          </a:p>
+          <a:p>
+            <a:pPr algn="l">
+              <a:spcAft>
+                <a:spcPts val="600"/>
+              </a:spcAft>
+              <a:defRPr sz="1500" b="0">
+                <a:solidFill>
+                  <a:srgbClr val="1A1A2E"/>
+                </a:solidFill>
+              </a:defRPr>
+            </a:pPr>
+            <a:r>
+              <a:t>  Citations (483 observations)  277K records   Specific CFR violations</a:t>
+            </a:r>
+          </a:p>
+          <a:p>
+            <a:pPr algn="l">
+              <a:spcAft>
+                <a:spcPts val="600"/>
+              </a:spcAft>
+              <a:defRPr sz="1500" b="0">
+                <a:solidFill>
+                  <a:srgbClr val="1A1A2E"/>
+                </a:solidFill>
+              </a:defRPr>
+            </a:pPr>
+            <a:r>
+              <a:t>  Warning Letters               3,608 records  Formal enforcement notices</a:t>
+            </a:r>
+          </a:p>
+          <a:p>
+            <a:pPr algn="l">
+              <a:spcAft>
+                <a:spcPts val="600"/>
+              </a:spcAft>
+              <a:defRPr sz="1500" b="0">
+                <a:solidFill>
+                  <a:srgbClr val="1A1A2E"/>
+                </a:solidFill>
+              </a:defRPr>
+            </a:pPr>
+            <a:r>
+              <a:t>  Enforcement / Recalls         57K records    Product recalls by severity</a:t>
+            </a:r>
+          </a:p>
+          <a:p>
+            <a:pPr algn="l">
+              <a:spcAft>
+                <a:spcPts val="600"/>
+              </a:spcAft>
+              <a:defRPr sz="1500" b="0">
+                <a:solidFill>
+                  <a:srgbClr val="1A1A2E"/>
+                </a:solidFill>
+              </a:defRPr>
+            </a:pPr>
+            <a:r>
+              <a:t>  Published Form 483s           1,973 records  Detailed inspection reports</a:t>
+            </a:r>
+          </a:p>
+          <a:p>
+            <a:pPr algn="l">
+              <a:spcAft>
+                <a:spcPts val="600"/>
+              </a:spcAft>
+              <a:defRPr sz="1500" b="0">
+                <a:solidFill>
+                  <a:srgbClr val="1A1A2E"/>
+                </a:solidFill>
+              </a:defRPr>
+            </a:pPr>
+            <a:r>
+              <a:t>  </a:t>
+            </a:r>
+          </a:p>
+          <a:p>
+            <a:pPr algn="l">
+              <a:spcAft>
+                <a:spcPts val="600"/>
+              </a:spcAft>
+              <a:defRPr sz="1500" b="0">
+                <a:solidFill>
+                  <a:srgbClr val="1A1A2E"/>
+                </a:solidFill>
+              </a:defRPr>
+            </a:pPr>
+            <a:r>
+              <a:t>  All linked via FEI Number (facility ID)</a:t>
+            </a:r>
+          </a:p>
+          <a:p>
+            <a:pPr algn="l">
+              <a:spcAft>
+                <a:spcPts val="600"/>
+              </a:spcAft>
+              <a:defRPr sz="1500" b="0">
+                <a:solidFill>
+                  <a:srgbClr val="1A1A2E"/>
+                </a:solidFill>
+              </a:defRPr>
+            </a:pPr>
+            <a:r>
+              <a:t>  Warning letters + enforcement: fuzzy name matching (TF-IDF + location)</a:t>
+            </a:r>
+          </a:p>
+        </p:txBody>
+      </p:sp>
+      <p:sp>
+        <p:nvSpPr>
+          <p:cNvPr id="5" name="TextBox 4"/>
+          <p:cNvSpPr txBox="1"/>
+          <p:nvPr/>
+        </p:nvSpPr>
+        <p:spPr>
+          <a:xfrm>
+            <a:off x="548640" y="5943600"/>
+            <a:ext cx="8046720" cy="548640"/>
+          </a:xfrm>
+          <a:prstGeom prst="rect">
+            <a:avLst/>
+          </a:prstGeom>
+          <a:noFill/>
+        </p:spPr>
+        <p:txBody>
+          <a:bodyPr wrap="square">
+            <a:spAutoFit/>
+          </a:bodyPr>
+          <a:lstStyle/>
+          <a:p>
+            <a:pPr algn="l">
+              <a:spcAft>
+                <a:spcPts val="440"/>
+              </a:spcAft>
+              <a:defRPr sz="1100" b="0">
+                <a:solidFill>
+                  <a:srgbClr val="5A5A6E"/>
+                </a:solidFill>
+              </a:defRPr>
+            </a:pPr>
+            <a:r>
+              <a:t>Coverage: WL 55% matched, Enforcement 82% matched. Remaining are online pharmacies with no inspection history.</a:t>
             </a:r>
           </a:p>
         </p:txBody>
@@ -4765,6 +5518,14 @@
 <file path=ppt/slides/slide5.xml><?xml version="1.0" encoding="utf-8"?>
 <p:sld xmlns:a="http://schemas.openxmlformats.org/drawingml/2006/main" xmlns:p="http://schemas.openxmlformats.org/presentationml/2006/main" xmlns:r="http://schemas.openxmlformats.org/officeDocument/2006/relationships">
   <p:cSld>
+    <p:bg>
+      <p:bgPr>
+        <a:solidFill>
+          <a:srgbClr val="FFFFFF"/>
+        </a:solidFill>
+        <a:effectLst/>
+      </p:bgPr>
+    </p:bg>
     <p:spTree>
       <p:nvGrpSpPr>
         <p:cNvPr id="1" name=""/>
@@ -4774,21 +5535,31 @@
       <p:grpSpPr/>
       <p:sp>
         <p:nvSpPr>
-          <p:cNvPr id="2" name="Title 1"/>
-          <p:cNvSpPr>
-            <a:spLocks noGrp="1"/>
-          </p:cNvSpPr>
-          <p:nvPr>
-            <p:ph type="title"/>
-          </p:nvPr>
-        </p:nvSpPr>
-        <p:spPr/>
-        <p:txBody>
-          <a:bodyPr/>
-          <a:lstStyle/>
-          <a:p>
-            <a:pPr>
-              <a:defRPr sz="2800">
+          <p:cNvPr id="2" name="TextBox 1"/>
+          <p:cNvSpPr txBox="1"/>
+          <p:nvPr/>
+        </p:nvSpPr>
+        <p:spPr>
+          <a:xfrm>
+            <a:off x="548640" y="365760"/>
+            <a:ext cx="8046720" cy="731520"/>
+          </a:xfrm>
+          <a:prstGeom prst="rect">
+            <a:avLst/>
+          </a:prstGeom>
+          <a:noFill/>
+        </p:spPr>
+        <p:txBody>
+          <a:bodyPr wrap="square">
+            <a:spAutoFit/>
+          </a:bodyPr>
+          <a:lstStyle/>
+          <a:p>
+            <a:pPr algn="l">
+              <a:spcAft>
+                <a:spcPts val="1040"/>
+              </a:spcAft>
+              <a:defRPr sz="2600" b="1">
                 <a:solidFill>
                   <a:srgbClr val="1A1A2E"/>
                 </a:solidFill>
@@ -4802,136 +5573,231 @@
       </p:sp>
       <p:sp>
         <p:nvSpPr>
-          <p:cNvPr id="3" name="Content Placeholder 2"/>
-          <p:cNvSpPr>
-            <a:spLocks noGrp="1"/>
-          </p:cNvSpPr>
-          <p:nvPr>
-            <p:ph idx="1"/>
-          </p:nvPr>
-        </p:nvSpPr>
-        <p:spPr/>
-        <p:txBody>
-          <a:bodyPr/>
-          <a:lstStyle/>
-          <a:p>
-            <a:pPr>
-              <a:spcAft>
-                <a:spcPts val="1200"/>
-              </a:spcAft>
-              <a:defRPr sz="1400">
-                <a:solidFill>
-                  <a:srgbClr val="1654CC"/>
-                </a:solidFill>
-              </a:defRPr>
-            </a:pPr>
-            <a:r>
-              <a:t>Predicting the future using only past information</a:t>
-            </a:r>
-          </a:p>
-          <a:p>
-            <a:pPr>
-              <a:spcAft>
-                <a:spcPts val="800"/>
-              </a:spcAft>
-              <a:defRPr sz="1600">
-                <a:solidFill>
-                  <a:srgbClr val="1A1A2E"/>
-                </a:solidFill>
-              </a:defRPr>
-            </a:pPr>
-            <a:r>
-              <a:t>Unit of analysis: one row per inspection</a:t>
-            </a:r>
-          </a:p>
-          <a:p>
-            <a:pPr>
-              <a:spcAft>
-                <a:spcPts val="800"/>
-              </a:spcAft>
-              <a:defRPr sz="1600">
-                <a:solidFill>
-                  <a:srgbClr val="1A1A2E"/>
-                </a:solidFill>
-              </a:defRPr>
-            </a:pPr>
-            <a:r>
-              <a:t>All features built from PRIOR history only (no data leakage)</a:t>
-            </a:r>
-          </a:p>
-          <a:p>
-            <a:pPr>
-              <a:spcAft>
-                <a:spcPts val="800"/>
-              </a:spcAft>
-              <a:defRPr sz="1600">
-                <a:solidFill>
-                  <a:srgbClr val="1A1A2E"/>
-                </a:solidFill>
-              </a:defRPr>
-            </a:pPr>
-            <a:r>
-              <a:t>Inspection history: n_prior_oai, pct_oai, days_since_last, trend</a:t>
-            </a:r>
-          </a:p>
-          <a:p>
-            <a:pPr>
-              <a:spcAft>
-                <a:spcPts val="800"/>
-              </a:spcAft>
-              <a:defRPr sz="1600">
-                <a:solidFill>
-                  <a:srgbClr val="1A1A2E"/>
-                </a:solidFill>
-              </a:defRPr>
-            </a:pPr>
-            <a:r>
-              <a:t>Citations: total count, unique CFR codes, max in single inspection</a:t>
-            </a:r>
-          </a:p>
-          <a:p>
-            <a:pPr>
-              <a:spcAft>
-                <a:spcPts val="800"/>
-              </a:spcAft>
-              <a:defRPr sz="1600">
-                <a:solidFill>
-                  <a:srgbClr val="1A1A2E"/>
-                </a:solidFill>
-              </a:defRPr>
-            </a:pPr>
-            <a:r>
-              <a:t>Warning letters: count, recency (via entity matching)</a:t>
-            </a:r>
-          </a:p>
-          <a:p>
-            <a:pPr>
-              <a:spcAft>
-                <a:spcPts val="800"/>
-              </a:spcAft>
-              <a:defRPr sz="1600">
-                <a:solidFill>
-                  <a:srgbClr val="1A1A2E"/>
-                </a:solidFill>
-              </a:defRPr>
-            </a:pPr>
-            <a:r>
-              <a:t>Enforcement: recall count, Class I recalls</a:t>
-            </a:r>
-          </a:p>
-          <a:p>
-            <a:pPr>
-              <a:spcAft>
-                <a:spcPts val="800"/>
-              </a:spcAft>
-              <a:defRPr sz="1600">
-                <a:solidFill>
-                  <a:srgbClr val="1A1A2E"/>
-                </a:solidFill>
-              </a:defRPr>
-            </a:pPr>
-            <a:r>
-              <a:t>Temporal split: train &lt; 2025, test ≥ 2025</a:t>
+          <p:cNvPr id="3" name="Rectangle 2"/>
+          <p:cNvSpPr/>
+          <p:nvPr/>
+        </p:nvSpPr>
+        <p:spPr>
+          <a:xfrm>
+            <a:off x="548640" y="1005840"/>
+            <a:ext cx="1828800" cy="38100"/>
+          </a:xfrm>
+          <a:prstGeom prst="rect">
+            <a:avLst/>
+          </a:prstGeom>
+          <a:solidFill>
+            <a:srgbClr val="266DF0"/>
+          </a:solidFill>
+          <a:ln>
+            <a:noFill/>
+          </a:ln>
+        </p:spPr>
+        <p:style>
+          <a:lnRef idx="1">
+            <a:schemeClr val="accent1"/>
+          </a:lnRef>
+          <a:fillRef idx="3">
+            <a:schemeClr val="accent1"/>
+          </a:fillRef>
+          <a:effectRef idx="2">
+            <a:schemeClr val="accent1"/>
+          </a:effectRef>
+          <a:fontRef idx="minor">
+            <a:schemeClr val="lt1"/>
+          </a:fontRef>
+        </p:style>
+        <p:txBody>
+          <a:bodyPr rtlCol="0" anchor="ctr"/>
+          <a:lstStyle/>
+          <a:p>
+            <a:pPr algn="ctr"/>
+          </a:p>
+        </p:txBody>
+      </p:sp>
+      <p:sp>
+        <p:nvSpPr>
+          <p:cNvPr id="4" name="TextBox 3"/>
+          <p:cNvSpPr txBox="1"/>
+          <p:nvPr/>
+        </p:nvSpPr>
+        <p:spPr>
+          <a:xfrm>
+            <a:off x="548640" y="1280160"/>
+            <a:ext cx="8046720" cy="4572000"/>
+          </a:xfrm>
+          <a:prstGeom prst="rect">
+            <a:avLst/>
+          </a:prstGeom>
+          <a:noFill/>
+        </p:spPr>
+        <p:txBody>
+          <a:bodyPr wrap="square">
+            <a:spAutoFit/>
+          </a:bodyPr>
+          <a:lstStyle/>
+          <a:p>
+            <a:pPr algn="l">
+              <a:spcAft>
+                <a:spcPts val="600"/>
+              </a:spcAft>
+              <a:defRPr sz="1500" b="0">
+                <a:solidFill>
+                  <a:srgbClr val="1A1A2E"/>
+                </a:solidFill>
+              </a:defRPr>
+            </a:pPr>
+            <a:r>
+              <a:t>  Unit of analysis: one row per inspection</a:t>
+            </a:r>
+          </a:p>
+          <a:p>
+            <a:pPr algn="l">
+              <a:spcAft>
+                <a:spcPts val="600"/>
+              </a:spcAft>
+              <a:defRPr sz="1500" b="0">
+                <a:solidFill>
+                  <a:srgbClr val="1A1A2E"/>
+                </a:solidFill>
+              </a:defRPr>
+            </a:pPr>
+            <a:r>
+              <a:t>  All features from PRIOR history only (no data leakage)</a:t>
+            </a:r>
+          </a:p>
+          <a:p>
+            <a:pPr algn="l">
+              <a:spcAft>
+                <a:spcPts val="600"/>
+              </a:spcAft>
+              <a:defRPr sz="1500" b="0">
+                <a:solidFill>
+                  <a:srgbClr val="1A1A2E"/>
+                </a:solidFill>
+              </a:defRPr>
+            </a:pPr>
+            <a:r>
+              <a:t>  </a:t>
+            </a:r>
+          </a:p>
+          <a:p>
+            <a:pPr algn="l">
+              <a:spcAft>
+                <a:spcPts val="600"/>
+              </a:spcAft>
+              <a:defRPr sz="1500" b="0">
+                <a:solidFill>
+                  <a:srgbClr val="1A1A2E"/>
+                </a:solidFill>
+              </a:defRPr>
+            </a:pPr>
+            <a:r>
+              <a:t>  INSPECTION HISTORY    n_prior_oai, n_prior_nai, trend, recency</a:t>
+            </a:r>
+          </a:p>
+          <a:p>
+            <a:pPr algn="l">
+              <a:spcAft>
+                <a:spcPts val="600"/>
+              </a:spcAft>
+              <a:defRPr sz="1500" b="0">
+                <a:solidFill>
+                  <a:srgbClr val="1A1A2E"/>
+                </a:solidFill>
+              </a:defRPr>
+            </a:pPr>
+            <a:r>
+              <a:t>  CITATIONS             total count, unique CFR codes, max in single inspection</a:t>
+            </a:r>
+          </a:p>
+          <a:p>
+            <a:pPr algn="l">
+              <a:spcAft>
+                <a:spcPts val="600"/>
+              </a:spcAft>
+              <a:defRPr sz="1500" b="0">
+                <a:solidFill>
+                  <a:srgbClr val="1A1A2E"/>
+                </a:solidFill>
+              </a:defRPr>
+            </a:pPr>
+            <a:r>
+              <a:t>  WARNING LETTERS       count, days since last (via entity matching)</a:t>
+            </a:r>
+          </a:p>
+          <a:p>
+            <a:pPr algn="l">
+              <a:spcAft>
+                <a:spcPts val="600"/>
+              </a:spcAft>
+              <a:defRPr sz="1500" b="0">
+                <a:solidFill>
+                  <a:srgbClr val="1A1A2E"/>
+                </a:solidFill>
+              </a:defRPr>
+            </a:pPr>
+            <a:r>
+              <a:t>  ENFORCEMENT           recall count, Class I count</a:t>
+            </a:r>
+          </a:p>
+          <a:p>
+            <a:pPr algn="l">
+              <a:spcAft>
+                <a:spcPts val="600"/>
+              </a:spcAft>
+              <a:defRPr sz="1500" b="0">
+                <a:solidFill>
+                  <a:srgbClr val="1A1A2E"/>
+                </a:solidFill>
+              </a:defRPr>
+            </a:pPr>
+            <a:r>
+              <a:t>  483s                  count of published forms</a:t>
+            </a:r>
+          </a:p>
+          <a:p>
+            <a:pPr algn="l">
+              <a:spcAft>
+                <a:spcPts val="600"/>
+              </a:spcAft>
+              <a:defRPr sz="1500" b="0">
+                <a:solidFill>
+                  <a:srgbClr val="1A1A2E"/>
+                </a:solidFill>
+              </a:defRPr>
+            </a:pPr>
+            <a:r>
+              <a:t>  CONTEXT               product type, country, project area</a:t>
+            </a:r>
+          </a:p>
+          <a:p>
+            <a:pPr algn="l">
+              <a:spcAft>
+                <a:spcPts val="600"/>
+              </a:spcAft>
+              <a:defRPr sz="1500" b="0">
+                <a:solidFill>
+                  <a:srgbClr val="1A1A2E"/>
+                </a:solidFill>
+              </a:defRPr>
+            </a:pPr>
+            <a:r>
+              <a:t>  </a:t>
+            </a:r>
+          </a:p>
+          <a:p>
+            <a:pPr algn="l">
+              <a:spcAft>
+                <a:spcPts val="600"/>
+              </a:spcAft>
+              <a:defRPr sz="1500" b="0">
+                <a:solidFill>
+                  <a:srgbClr val="1A1A2E"/>
+                </a:solidFill>
+              </a:defRPr>
+            </a:pPr>
+            <a:r>
+              <a:t>  22 features total  |  Temporal split: train &lt; 2025, test ≥ 2025</a:t>
             </a:r>
           </a:p>
         </p:txBody>
@@ -4947,6 +5813,14 @@
 <file path=ppt/slides/slide6.xml><?xml version="1.0" encoding="utf-8"?>
 <p:sld xmlns:a="http://schemas.openxmlformats.org/drawingml/2006/main" xmlns:p="http://schemas.openxmlformats.org/presentationml/2006/main" xmlns:r="http://schemas.openxmlformats.org/officeDocument/2006/relationships">
   <p:cSld>
+    <p:bg>
+      <p:bgPr>
+        <a:solidFill>
+          <a:srgbClr val="266DF0"/>
+        </a:solidFill>
+        <a:effectLst/>
+      </p:bgPr>
+    </p:bg>
     <p:spTree>
       <p:nvGrpSpPr>
         <p:cNvPr id="1" name=""/>
@@ -4956,161 +5830,38 @@
       <p:grpSpPr/>
       <p:sp>
         <p:nvSpPr>
-          <p:cNvPr id="2" name="Title 1"/>
-          <p:cNvSpPr>
-            <a:spLocks noGrp="1"/>
-          </p:cNvSpPr>
-          <p:nvPr>
-            <p:ph type="title"/>
-          </p:nvPr>
-        </p:nvSpPr>
-        <p:spPr/>
-        <p:txBody>
-          <a:bodyPr/>
-          <a:lstStyle/>
-          <a:p>
-            <a:pPr>
-              <a:defRPr sz="2800">
-                <a:solidFill>
-                  <a:srgbClr val="1A1A2E"/>
-                </a:solidFill>
-              </a:defRPr>
-            </a:pPr>
-            <a:r>
-              <a:t>Model Results</a:t>
-            </a:r>
-          </a:p>
-        </p:txBody>
-      </p:sp>
-      <p:sp>
-        <p:nvSpPr>
-          <p:cNvPr id="3" name="Content Placeholder 2"/>
-          <p:cNvSpPr>
-            <a:spLocks noGrp="1"/>
-          </p:cNvSpPr>
-          <p:nvPr>
-            <p:ph idx="1"/>
-          </p:nvPr>
-        </p:nvSpPr>
-        <p:spPr/>
-        <p:txBody>
-          <a:bodyPr/>
-          <a:lstStyle/>
-          <a:p>
-            <a:pPr>
-              <a:spcAft>
-                <a:spcPts val="1200"/>
-              </a:spcAft>
-              <a:defRPr sz="1400">
-                <a:solidFill>
-                  <a:srgbClr val="1654CC"/>
-                </a:solidFill>
-              </a:defRPr>
-            </a:pPr>
-            <a:r>
-              <a:t>ROC-AUC = 0.87 | PR-AUC = 0.37</a:t>
-            </a:r>
-          </a:p>
-          <a:p>
-            <a:pPr>
-              <a:spcAft>
-                <a:spcPts val="800"/>
-              </a:spcAft>
-              <a:defRPr sz="1600">
-                <a:solidFill>
-                  <a:srgbClr val="1A1A2E"/>
-                </a:solidFill>
-              </a:defRPr>
-            </a:pPr>
-            <a:r>
-              <a:t>Logistic Regression (baseline):  ROC-AUC = 0.72</a:t>
-            </a:r>
-          </a:p>
-          <a:p>
-            <a:pPr>
-              <a:spcAft>
-                <a:spcPts val="800"/>
-              </a:spcAft>
-              <a:defRPr sz="1600">
-                <a:solidFill>
-                  <a:srgbClr val="1A1A2E"/>
-                </a:solidFill>
-              </a:defRPr>
-            </a:pPr>
-            <a:r>
-              <a:t>XGBoost (weighted):              ROC-AUC = 0.87  ← best</a:t>
-            </a:r>
-          </a:p>
-          <a:p>
-            <a:pPr>
-              <a:spcAft>
-                <a:spcPts val="800"/>
-              </a:spcAft>
-              <a:defRPr sz="1600">
-                <a:solidFill>
-                  <a:srgbClr val="1A1A2E"/>
-                </a:solidFill>
-              </a:defRPr>
-            </a:pPr>
-            <a:r>
-              <a:t>XGBoost (tuned):                 ROC-AUC = 0.87</a:t>
-            </a:r>
-          </a:p>
-          <a:p>
-            <a:pPr>
-              <a:spcAft>
-                <a:spcPts val="800"/>
-              </a:spcAft>
-              <a:defRPr sz="1600">
-                <a:solidFill>
-                  <a:srgbClr val="1A1A2E"/>
-                </a:solidFill>
-              </a:defRPr>
-            </a:pPr>
-          </a:p>
-          <a:p>
-            <a:pPr>
-              <a:spcAft>
-                <a:spcPts val="800"/>
-              </a:spcAft>
-              <a:defRPr sz="1600">
-                <a:solidFill>
-                  <a:srgbClr val="1A1A2E"/>
-                </a:solidFill>
-              </a:defRPr>
-            </a:pPr>
-            <a:r>
-              <a:t>XGBoost significantly outperforms linear model</a:t>
-            </a:r>
-          </a:p>
-          <a:p>
-            <a:pPr>
-              <a:spcAft>
-                <a:spcPts val="800"/>
-              </a:spcAft>
-              <a:defRPr sz="1600">
-                <a:solidFill>
-                  <a:srgbClr val="1A1A2E"/>
-                </a:solidFill>
-              </a:defRPr>
-            </a:pPr>
-            <a:r>
-              <a:t>Hyperparameter tuning: marginal improvement (defaults already strong)</a:t>
-            </a:r>
-          </a:p>
-          <a:p>
-            <a:pPr>
-              <a:spcAft>
-                <a:spcPts val="800"/>
-              </a:spcAft>
-              <a:defRPr sz="1600">
-                <a:solidFill>
-                  <a:srgbClr val="1A1A2E"/>
-                </a:solidFill>
-              </a:defRPr>
-            </a:pPr>
-            <a:r>
-              <a:t>Class imbalance handled via scale_pos_weight (not SMOTE)</a:t>
+          <p:cNvPr id="2" name="TextBox 1"/>
+          <p:cNvSpPr txBox="1"/>
+          <p:nvPr/>
+        </p:nvSpPr>
+        <p:spPr>
+          <a:xfrm>
+            <a:off x="914400" y="2560320"/>
+            <a:ext cx="7315200" cy="1371600"/>
+          </a:xfrm>
+          <a:prstGeom prst="rect">
+            <a:avLst/>
+          </a:prstGeom>
+          <a:noFill/>
+        </p:spPr>
+        <p:txBody>
+          <a:bodyPr wrap="square">
+            <a:spAutoFit/>
+          </a:bodyPr>
+          <a:lstStyle/>
+          <a:p>
+            <a:pPr algn="ctr">
+              <a:spcAft>
+                <a:spcPts val="1360"/>
+              </a:spcAft>
+              <a:defRPr sz="3400" b="1">
+                <a:solidFill>
+                  <a:srgbClr val="FFFFFF"/>
+                </a:solidFill>
+              </a:defRPr>
+            </a:pPr>
+            <a:r>
+              <a:t>Modeling</a:t>
             </a:r>
           </a:p>
         </p:txBody>
@@ -5126,6 +5877,14 @@
 <file path=ppt/slides/slide7.xml><?xml version="1.0" encoding="utf-8"?>
 <p:sld xmlns:a="http://schemas.openxmlformats.org/drawingml/2006/main" xmlns:p="http://schemas.openxmlformats.org/presentationml/2006/main" xmlns:r="http://schemas.openxmlformats.org/officeDocument/2006/relationships">
   <p:cSld>
+    <p:bg>
+      <p:bgPr>
+        <a:solidFill>
+          <a:srgbClr val="FFFFFF"/>
+        </a:solidFill>
+        <a:effectLst/>
+      </p:bgPr>
+    </p:bg>
     <p:spTree>
       <p:nvGrpSpPr>
         <p:cNvPr id="1" name=""/>
@@ -5135,31 +5894,14 @@
       <p:grpSpPr/>
       <p:sp>
         <p:nvSpPr>
-          <p:cNvPr id="2" name="Title 1"/>
-          <p:cNvSpPr>
-            <a:spLocks noGrp="1"/>
-          </p:cNvSpPr>
-          <p:nvPr>
-            <p:ph type="title"/>
-          </p:nvPr>
-        </p:nvSpPr>
-        <p:spPr/>
-        <p:txBody>
-          <a:bodyPr/>
-          <a:lstStyle/>
-          <a:p/>
-        </p:txBody>
-      </p:sp>
-      <p:sp>
-        <p:nvSpPr>
-          <p:cNvPr id="3" name="TextBox 2"/>
+          <p:cNvPr id="2" name="TextBox 1"/>
           <p:cNvSpPr txBox="1"/>
           <p:nvPr/>
         </p:nvSpPr>
         <p:spPr>
           <a:xfrm>
-            <a:off x="457200" y="274320"/>
-            <a:ext cx="8229600" cy="731520"/>
+            <a:off x="548640" y="365760"/>
+            <a:ext cx="8046720" cy="731520"/>
           </a:xfrm>
           <a:prstGeom prst="rect">
             <a:avLst/>
@@ -5173,21 +5915,805 @@
           <a:lstStyle/>
           <a:p>
             <a:pPr algn="l">
-              <a:defRPr sz="2400" b="1">
-                <a:solidFill>
-                  <a:srgbClr val="1A1A2E"/>
-                </a:solidFill>
-              </a:defRPr>
-            </a:pPr>
-            <a:r>
-              <a:t>Model Comparison</a:t>
+              <a:spcAft>
+                <a:spcPts val="1040"/>
+              </a:spcAft>
+              <a:defRPr sz="2600" b="1">
+                <a:solidFill>
+                  <a:srgbClr val="1A1A2E"/>
+                </a:solidFill>
+              </a:defRPr>
+            </a:pPr>
+            <a:r>
+              <a:t>Approach &amp; Decisions</a:t>
+            </a:r>
+          </a:p>
+        </p:txBody>
+      </p:sp>
+      <p:sp>
+        <p:nvSpPr>
+          <p:cNvPr id="3" name="Rectangle 2"/>
+          <p:cNvSpPr/>
+          <p:nvPr/>
+        </p:nvSpPr>
+        <p:spPr>
+          <a:xfrm>
+            <a:off x="548640" y="1005840"/>
+            <a:ext cx="1828800" cy="38100"/>
+          </a:xfrm>
+          <a:prstGeom prst="rect">
+            <a:avLst/>
+          </a:prstGeom>
+          <a:solidFill>
+            <a:srgbClr val="266DF0"/>
+          </a:solidFill>
+          <a:ln>
+            <a:noFill/>
+          </a:ln>
+        </p:spPr>
+        <p:style>
+          <a:lnRef idx="1">
+            <a:schemeClr val="accent1"/>
+          </a:lnRef>
+          <a:fillRef idx="3">
+            <a:schemeClr val="accent1"/>
+          </a:fillRef>
+          <a:effectRef idx="2">
+            <a:schemeClr val="accent1"/>
+          </a:effectRef>
+          <a:fontRef idx="minor">
+            <a:schemeClr val="lt1"/>
+          </a:fontRef>
+        </p:style>
+        <p:txBody>
+          <a:bodyPr rtlCol="0" anchor="ctr"/>
+          <a:lstStyle/>
+          <a:p>
+            <a:pPr algn="ctr"/>
+          </a:p>
+        </p:txBody>
+      </p:sp>
+      <p:sp>
+        <p:nvSpPr>
+          <p:cNvPr id="4" name="TextBox 3"/>
+          <p:cNvSpPr txBox="1"/>
+          <p:nvPr/>
+        </p:nvSpPr>
+        <p:spPr>
+          <a:xfrm>
+            <a:off x="548640" y="1280160"/>
+            <a:ext cx="8046720" cy="4572000"/>
+          </a:xfrm>
+          <a:prstGeom prst="rect">
+            <a:avLst/>
+          </a:prstGeom>
+          <a:noFill/>
+        </p:spPr>
+        <p:txBody>
+          <a:bodyPr wrap="square">
+            <a:spAutoFit/>
+          </a:bodyPr>
+          <a:lstStyle/>
+          <a:p>
+            <a:pPr algn="l">
+              <a:spcAft>
+                <a:spcPts val="600"/>
+              </a:spcAft>
+              <a:defRPr sz="1500" b="0">
+                <a:solidFill>
+                  <a:srgbClr val="1A1A2E"/>
+                </a:solidFill>
+              </a:defRPr>
+            </a:pPr>
+            <a:r>
+              <a:t>  Baseline: Logistic Regression (fully interpretable)</a:t>
+            </a:r>
+          </a:p>
+          <a:p>
+            <a:pPr algn="l">
+              <a:spcAft>
+                <a:spcPts val="600"/>
+              </a:spcAft>
+              <a:defRPr sz="1500" b="0">
+                <a:solidFill>
+                  <a:srgbClr val="1A1A2E"/>
+                </a:solidFill>
+              </a:defRPr>
+            </a:pPr>
+            <a:r>
+              <a:t>  Main: XGBoost with class weighting (scale_pos_weight = 20)</a:t>
+            </a:r>
+          </a:p>
+          <a:p>
+            <a:pPr algn="l">
+              <a:spcAft>
+                <a:spcPts val="600"/>
+              </a:spcAft>
+              <a:defRPr sz="1500" b="0">
+                <a:solidFill>
+                  <a:srgbClr val="1A1A2E"/>
+                </a:solidFill>
+              </a:defRPr>
+            </a:pPr>
+            <a:r>
+              <a:t>  Tuning: RandomizedSearchCV, 30 iterations, PR-AUC, TimeSeriesSplit</a:t>
+            </a:r>
+          </a:p>
+          <a:p>
+            <a:pPr algn="l">
+              <a:spcAft>
+                <a:spcPts val="600"/>
+              </a:spcAft>
+              <a:defRPr sz="1500" b="0">
+                <a:solidFill>
+                  <a:srgbClr val="1A1A2E"/>
+                </a:solidFill>
+              </a:defRPr>
+            </a:pPr>
+            <a:r>
+              <a:t>  </a:t>
+            </a:r>
+          </a:p>
+          <a:p>
+            <a:pPr algn="l">
+              <a:spcAft>
+                <a:spcPts val="600"/>
+              </a:spcAft>
+              <a:defRPr sz="1500" b="0">
+                <a:solidFill>
+                  <a:srgbClr val="1A1A2E"/>
+                </a:solidFill>
+              </a:defRPr>
+            </a:pPr>
+            <a:r>
+              <a:t>  KEY DECISIONS:</a:t>
+            </a:r>
+          </a:p>
+          <a:p>
+            <a:pPr algn="l">
+              <a:spcAft>
+                <a:spcPts val="600"/>
+              </a:spcAft>
+              <a:defRPr sz="1500" b="0">
+                <a:solidFill>
+                  <a:srgbClr val="1A1A2E"/>
+                </a:solidFill>
+              </a:defRPr>
+            </a:pPr>
+            <a:r>
+              <a:t>    • No SMOTE — 7,200 positives is enough; class weights suffice</a:t>
+            </a:r>
+          </a:p>
+          <a:p>
+            <a:pPr algn="l">
+              <a:spcAft>
+                <a:spcPts val="600"/>
+              </a:spcAft>
+              <a:defRPr sz="1500" b="0">
+                <a:solidFill>
+                  <a:srgbClr val="1A1A2E"/>
+                </a:solidFill>
+              </a:defRPr>
+            </a:pPr>
+            <a:r>
+              <a:t>    • Removed last_classification_oai — model improved without it</a:t>
+            </a:r>
+          </a:p>
+          <a:p>
+            <a:pPr algn="l">
+              <a:spcAft>
+                <a:spcPts val="600"/>
+              </a:spcAft>
+              <a:defRPr sz="1500" b="0">
+                <a:solidFill>
+                  <a:srgbClr val="1A1A2E"/>
+                </a:solidFill>
+              </a:defRPr>
+            </a:pPr>
+            <a:r>
+              <a:t>      (was overfitting to a trivial pattern; other features encode same info)</a:t>
+            </a:r>
+          </a:p>
+          <a:p>
+            <a:pPr algn="l">
+              <a:spcAft>
+                <a:spcPts val="600"/>
+              </a:spcAft>
+              <a:defRPr sz="1500" b="0">
+                <a:solidFill>
+                  <a:srgbClr val="1A1A2E"/>
+                </a:solidFill>
+              </a:defRPr>
+            </a:pPr>
+            <a:r>
+              <a:t>    • Threshold optimized for recall (asymmetric cost in supply chain risk)</a:t>
+            </a:r>
+          </a:p>
+        </p:txBody>
+      </p:sp>
+    </p:spTree>
+  </p:cSld>
+  <p:clrMapOvr>
+    <a:masterClrMapping/>
+  </p:clrMapOvr>
+</p:sld>
+</file>
+
+<file path=ppt/slides/slide8.xml><?xml version="1.0" encoding="utf-8"?>
+<p:sld xmlns:a="http://schemas.openxmlformats.org/drawingml/2006/main" xmlns:p="http://schemas.openxmlformats.org/presentationml/2006/main" xmlns:r="http://schemas.openxmlformats.org/officeDocument/2006/relationships">
+  <p:cSld>
+    <p:bg>
+      <p:bgPr>
+        <a:solidFill>
+          <a:srgbClr val="FFFFFF"/>
+        </a:solidFill>
+        <a:effectLst/>
+      </p:bgPr>
+    </p:bg>
+    <p:spTree>
+      <p:nvGrpSpPr>
+        <p:cNvPr id="1" name=""/>
+        <p:cNvGrpSpPr/>
+        <p:nvPr/>
+      </p:nvGrpSpPr>
+      <p:grpSpPr/>
+      <p:sp>
+        <p:nvSpPr>
+          <p:cNvPr id="2" name="TextBox 1"/>
+          <p:cNvSpPr txBox="1"/>
+          <p:nvPr/>
+        </p:nvSpPr>
+        <p:spPr>
+          <a:xfrm>
+            <a:off x="548640" y="365760"/>
+            <a:ext cx="8046720" cy="731520"/>
+          </a:xfrm>
+          <a:prstGeom prst="rect">
+            <a:avLst/>
+          </a:prstGeom>
+          <a:noFill/>
+        </p:spPr>
+        <p:txBody>
+          <a:bodyPr wrap="square">
+            <a:spAutoFit/>
+          </a:bodyPr>
+          <a:lstStyle/>
+          <a:p>
+            <a:pPr algn="l">
+              <a:spcAft>
+                <a:spcPts val="1040"/>
+              </a:spcAft>
+              <a:defRPr sz="2600" b="1">
+                <a:solidFill>
+                  <a:srgbClr val="1A1A2E"/>
+                </a:solidFill>
+              </a:defRPr>
+            </a:pPr>
+            <a:r>
+              <a:t>Model Performance</a:t>
+            </a:r>
+          </a:p>
+        </p:txBody>
+      </p:sp>
+      <p:sp>
+        <p:nvSpPr>
+          <p:cNvPr id="3" name="TextBox 2"/>
+          <p:cNvSpPr txBox="1"/>
+          <p:nvPr/>
+        </p:nvSpPr>
+        <p:spPr>
+          <a:xfrm>
+            <a:off x="731520" y="1645920"/>
+            <a:ext cx="2560320" cy="457200"/>
+          </a:xfrm>
+          <a:prstGeom prst="rect">
+            <a:avLst/>
+          </a:prstGeom>
+          <a:noFill/>
+        </p:spPr>
+        <p:txBody>
+          <a:bodyPr wrap="square">
+            <a:spAutoFit/>
+          </a:bodyPr>
+          <a:lstStyle/>
+          <a:p>
+            <a:pPr algn="ctr">
+              <a:spcAft>
+                <a:spcPts val="520"/>
+              </a:spcAft>
+              <a:defRPr sz="1300" b="0">
+                <a:solidFill>
+                  <a:srgbClr val="5A5A6E"/>
+                </a:solidFill>
+              </a:defRPr>
+            </a:pPr>
+            <a:r>
+              <a:t>ROC-AUC</a:t>
+            </a:r>
+          </a:p>
+        </p:txBody>
+      </p:sp>
+      <p:sp>
+        <p:nvSpPr>
+          <p:cNvPr id="4" name="TextBox 3"/>
+          <p:cNvSpPr txBox="1"/>
+          <p:nvPr/>
+        </p:nvSpPr>
+        <p:spPr>
+          <a:xfrm>
+            <a:off x="731520" y="2103120"/>
+            <a:ext cx="2560320" cy="731520"/>
+          </a:xfrm>
+          <a:prstGeom prst="rect">
+            <a:avLst/>
+          </a:prstGeom>
+          <a:noFill/>
+        </p:spPr>
+        <p:txBody>
+          <a:bodyPr wrap="square">
+            <a:spAutoFit/>
+          </a:bodyPr>
+          <a:lstStyle/>
+          <a:p>
+            <a:pPr algn="ctr">
+              <a:spcAft>
+                <a:spcPts val="1440"/>
+              </a:spcAft>
+              <a:defRPr sz="3600" b="1">
+                <a:solidFill>
+                  <a:srgbClr val="266DF0"/>
+                </a:solidFill>
+              </a:defRPr>
+            </a:pPr>
+            <a:r>
+              <a:t>0.875</a:t>
+            </a:r>
+          </a:p>
+        </p:txBody>
+      </p:sp>
+      <p:sp>
+        <p:nvSpPr>
+          <p:cNvPr id="5" name="TextBox 4"/>
+          <p:cNvSpPr txBox="1"/>
+          <p:nvPr/>
+        </p:nvSpPr>
+        <p:spPr>
+          <a:xfrm>
+            <a:off x="731520" y="3017520"/>
+            <a:ext cx="2560320" cy="457200"/>
+          </a:xfrm>
+          <a:prstGeom prst="rect">
+            <a:avLst/>
+          </a:prstGeom>
+          <a:noFill/>
+        </p:spPr>
+        <p:txBody>
+          <a:bodyPr wrap="square">
+            <a:spAutoFit/>
+          </a:bodyPr>
+          <a:lstStyle/>
+          <a:p>
+            <a:pPr algn="ctr">
+              <a:spcAft>
+                <a:spcPts val="440"/>
+              </a:spcAft>
+              <a:defRPr sz="1100" b="0">
+                <a:solidFill>
+                  <a:srgbClr val="5A5A6E"/>
+                </a:solidFill>
+              </a:defRPr>
+            </a:pPr>
+            <a:r>
+              <a:t>Discrimination ability</a:t>
+            </a:r>
+          </a:p>
+        </p:txBody>
+      </p:sp>
+      <p:sp>
+        <p:nvSpPr>
+          <p:cNvPr id="6" name="TextBox 5"/>
+          <p:cNvSpPr txBox="1"/>
+          <p:nvPr/>
+        </p:nvSpPr>
+        <p:spPr>
+          <a:xfrm>
+            <a:off x="3657600" y="1645920"/>
+            <a:ext cx="2560320" cy="457200"/>
+          </a:xfrm>
+          <a:prstGeom prst="rect">
+            <a:avLst/>
+          </a:prstGeom>
+          <a:noFill/>
+        </p:spPr>
+        <p:txBody>
+          <a:bodyPr wrap="square">
+            <a:spAutoFit/>
+          </a:bodyPr>
+          <a:lstStyle/>
+          <a:p>
+            <a:pPr algn="ctr">
+              <a:spcAft>
+                <a:spcPts val="520"/>
+              </a:spcAft>
+              <a:defRPr sz="1300" b="0">
+                <a:solidFill>
+                  <a:srgbClr val="5A5A6E"/>
+                </a:solidFill>
+              </a:defRPr>
+            </a:pPr>
+            <a:r>
+              <a:t>PR-AUC</a:t>
+            </a:r>
+          </a:p>
+        </p:txBody>
+      </p:sp>
+      <p:sp>
+        <p:nvSpPr>
+          <p:cNvPr id="7" name="TextBox 6"/>
+          <p:cNvSpPr txBox="1"/>
+          <p:nvPr/>
+        </p:nvSpPr>
+        <p:spPr>
+          <a:xfrm>
+            <a:off x="3657600" y="2103120"/>
+            <a:ext cx="2560320" cy="731520"/>
+          </a:xfrm>
+          <a:prstGeom prst="rect">
+            <a:avLst/>
+          </a:prstGeom>
+          <a:noFill/>
+        </p:spPr>
+        <p:txBody>
+          <a:bodyPr wrap="square">
+            <a:spAutoFit/>
+          </a:bodyPr>
+          <a:lstStyle/>
+          <a:p>
+            <a:pPr algn="ctr">
+              <a:spcAft>
+                <a:spcPts val="1440"/>
+              </a:spcAft>
+              <a:defRPr sz="3600" b="1">
+                <a:solidFill>
+                  <a:srgbClr val="266DF0"/>
+                </a:solidFill>
+              </a:defRPr>
+            </a:pPr>
+            <a:r>
+              <a:t>0.376</a:t>
+            </a:r>
+          </a:p>
+        </p:txBody>
+      </p:sp>
+      <p:sp>
+        <p:nvSpPr>
+          <p:cNvPr id="8" name="TextBox 7"/>
+          <p:cNvSpPr txBox="1"/>
+          <p:nvPr/>
+        </p:nvSpPr>
+        <p:spPr>
+          <a:xfrm>
+            <a:off x="3657600" y="3017520"/>
+            <a:ext cx="2560320" cy="457200"/>
+          </a:xfrm>
+          <a:prstGeom prst="rect">
+            <a:avLst/>
+          </a:prstGeom>
+          <a:noFill/>
+        </p:spPr>
+        <p:txBody>
+          <a:bodyPr wrap="square">
+            <a:spAutoFit/>
+          </a:bodyPr>
+          <a:lstStyle/>
+          <a:p>
+            <a:pPr algn="ctr">
+              <a:spcAft>
+                <a:spcPts val="440"/>
+              </a:spcAft>
+              <a:defRPr sz="1100" b="0">
+                <a:solidFill>
+                  <a:srgbClr val="5A5A6E"/>
+                </a:solidFill>
+              </a:defRPr>
+            </a:pPr>
+            <a:r>
+              <a:t>7x better than random</a:t>
+            </a:r>
+          </a:p>
+        </p:txBody>
+      </p:sp>
+      <p:sp>
+        <p:nvSpPr>
+          <p:cNvPr id="9" name="TextBox 8"/>
+          <p:cNvSpPr txBox="1"/>
+          <p:nvPr/>
+        </p:nvSpPr>
+        <p:spPr>
+          <a:xfrm>
+            <a:off x="6583680" y="1645920"/>
+            <a:ext cx="2560320" cy="457200"/>
+          </a:xfrm>
+          <a:prstGeom prst="rect">
+            <a:avLst/>
+          </a:prstGeom>
+          <a:noFill/>
+        </p:spPr>
+        <p:txBody>
+          <a:bodyPr wrap="square">
+            <a:spAutoFit/>
+          </a:bodyPr>
+          <a:lstStyle/>
+          <a:p>
+            <a:pPr algn="ctr">
+              <a:spcAft>
+                <a:spcPts val="520"/>
+              </a:spcAft>
+              <a:defRPr sz="1300" b="0">
+                <a:solidFill>
+                  <a:srgbClr val="5A5A6E"/>
+                </a:solidFill>
+              </a:defRPr>
+            </a:pPr>
+            <a:r>
+              <a:t>Recall@80%</a:t>
+            </a:r>
+          </a:p>
+        </p:txBody>
+      </p:sp>
+      <p:sp>
+        <p:nvSpPr>
+          <p:cNvPr id="10" name="TextBox 9"/>
+          <p:cNvSpPr txBox="1"/>
+          <p:nvPr/>
+        </p:nvSpPr>
+        <p:spPr>
+          <a:xfrm>
+            <a:off x="6583680" y="2103120"/>
+            <a:ext cx="2560320" cy="731520"/>
+          </a:xfrm>
+          <a:prstGeom prst="rect">
+            <a:avLst/>
+          </a:prstGeom>
+          <a:noFill/>
+        </p:spPr>
+        <p:txBody>
+          <a:bodyPr wrap="square">
+            <a:spAutoFit/>
+          </a:bodyPr>
+          <a:lstStyle/>
+          <a:p>
+            <a:pPr algn="ctr">
+              <a:spcAft>
+                <a:spcPts val="1440"/>
+              </a:spcAft>
+              <a:defRPr sz="3600" b="1">
+                <a:solidFill>
+                  <a:srgbClr val="266DF0"/>
+                </a:solidFill>
+              </a:defRPr>
+            </a:pPr>
+            <a:r>
+              <a:t>80%</a:t>
+            </a:r>
+          </a:p>
+        </p:txBody>
+      </p:sp>
+      <p:sp>
+        <p:nvSpPr>
+          <p:cNvPr id="11" name="TextBox 10"/>
+          <p:cNvSpPr txBox="1"/>
+          <p:nvPr/>
+        </p:nvSpPr>
+        <p:spPr>
+          <a:xfrm>
+            <a:off x="6583680" y="3017520"/>
+            <a:ext cx="2560320" cy="457200"/>
+          </a:xfrm>
+          <a:prstGeom prst="rect">
+            <a:avLst/>
+          </a:prstGeom>
+          <a:noFill/>
+        </p:spPr>
+        <p:txBody>
+          <a:bodyPr wrap="square">
+            <a:spAutoFit/>
+          </a:bodyPr>
+          <a:lstStyle/>
+          <a:p>
+            <a:pPr algn="ctr">
+              <a:spcAft>
+                <a:spcPts val="440"/>
+              </a:spcAft>
+              <a:defRPr sz="1100" b="0">
+                <a:solidFill>
+                  <a:srgbClr val="5A5A6E"/>
+                </a:solidFill>
+              </a:defRPr>
+            </a:pPr>
+            <a:r>
+              <a:t>Catches 4/5 OAIs</a:t>
+            </a:r>
+          </a:p>
+        </p:txBody>
+      </p:sp>
+      <p:sp>
+        <p:nvSpPr>
+          <p:cNvPr id="12" name="TextBox 11"/>
+          <p:cNvSpPr txBox="1"/>
+          <p:nvPr/>
+        </p:nvSpPr>
+        <p:spPr>
+          <a:xfrm>
+            <a:off x="731520" y="3840480"/>
+            <a:ext cx="7680960" cy="2286000"/>
+          </a:xfrm>
+          <a:prstGeom prst="rect">
+            <a:avLst/>
+          </a:prstGeom>
+          <a:noFill/>
+        </p:spPr>
+        <p:txBody>
+          <a:bodyPr wrap="square">
+            <a:spAutoFit/>
+          </a:bodyPr>
+          <a:lstStyle/>
+          <a:p>
+            <a:pPr algn="l">
+              <a:spcAft>
+                <a:spcPts val="520"/>
+              </a:spcAft>
+              <a:defRPr sz="1300" b="0">
+                <a:solidFill>
+                  <a:srgbClr val="1A1A2E"/>
+                </a:solidFill>
+              </a:defRPr>
+            </a:pPr>
+            <a:r>
+              <a:t>Model                         ROC-AUC   PR-AUC</a:t>
+            </a:r>
+          </a:p>
+          <a:p>
+            <a:pPr algn="l">
+              <a:spcAft>
+                <a:spcPts val="520"/>
+              </a:spcAft>
+              <a:defRPr sz="1300" b="0">
+                <a:solidFill>
+                  <a:srgbClr val="1A1A2E"/>
+                </a:solidFill>
+              </a:defRPr>
+            </a:pPr>
+            <a:r>
+              <a:t>────────────────────────────────────────────────</a:t>
+            </a:r>
+          </a:p>
+          <a:p>
+            <a:pPr algn="l">
+              <a:spcAft>
+                <a:spcPts val="520"/>
+              </a:spcAft>
+              <a:defRPr sz="1300" b="0">
+                <a:solidFill>
+                  <a:srgbClr val="1A1A2E"/>
+                </a:solidFill>
+              </a:defRPr>
+            </a:pPr>
+            <a:r>
+              <a:t>Logistic Regression            0.739     0.254</a:t>
+            </a:r>
+          </a:p>
+          <a:p>
+            <a:pPr algn="l">
+              <a:spcAft>
+                <a:spcPts val="520"/>
+              </a:spcAft>
+              <a:defRPr sz="1300" b="0">
+                <a:solidFill>
+                  <a:srgbClr val="1A1A2E"/>
+                </a:solidFill>
+              </a:defRPr>
+            </a:pPr>
+            <a:r>
+              <a:t>XGBoost (weighted)             0.875     0.376  ← final</a:t>
+            </a:r>
+          </a:p>
+          <a:p>
+            <a:pPr algn="l">
+              <a:spcAft>
+                <a:spcPts val="520"/>
+              </a:spcAft>
+              <a:defRPr sz="1300" b="0">
+                <a:solidFill>
+                  <a:srgbClr val="1A1A2E"/>
+                </a:solidFill>
+              </a:defRPr>
+            </a:pPr>
+            <a:r>
+              <a:t>XGBoost (tuned)                0.870     0.358</a:t>
+            </a:r>
+          </a:p>
+          <a:p>
+            <a:pPr algn="l">
+              <a:spcAft>
+                <a:spcPts val="520"/>
+              </a:spcAft>
+              <a:defRPr sz="1300" b="0">
+                <a:solidFill>
+                  <a:srgbClr val="1A1A2E"/>
+                </a:solidFill>
+              </a:defRPr>
+            </a:pPr>
+          </a:p>
+        </p:txBody>
+      </p:sp>
+    </p:spTree>
+  </p:cSld>
+  <p:clrMapOvr>
+    <a:masterClrMapping/>
+  </p:clrMapOvr>
+</p:sld>
+</file>
+
+<file path=ppt/slides/slide9.xml><?xml version="1.0" encoding="utf-8"?>
+<p:sld xmlns:a="http://schemas.openxmlformats.org/drawingml/2006/main" xmlns:p="http://schemas.openxmlformats.org/presentationml/2006/main" xmlns:r="http://schemas.openxmlformats.org/officeDocument/2006/relationships">
+  <p:cSld>
+    <p:bg>
+      <p:bgPr>
+        <a:solidFill>
+          <a:srgbClr val="FFFFFF"/>
+        </a:solidFill>
+        <a:effectLst/>
+      </p:bgPr>
+    </p:bg>
+    <p:spTree>
+      <p:nvGrpSpPr>
+        <p:cNvPr id="1" name=""/>
+        <p:cNvGrpSpPr/>
+        <p:nvPr/>
+      </p:nvGrpSpPr>
+      <p:grpSpPr/>
+      <p:sp>
+        <p:nvSpPr>
+          <p:cNvPr id="2" name="TextBox 1"/>
+          <p:cNvSpPr txBox="1"/>
+          <p:nvPr/>
+        </p:nvSpPr>
+        <p:spPr>
+          <a:xfrm>
+            <a:off x="548640" y="274320"/>
+            <a:ext cx="8046720" cy="640080"/>
+          </a:xfrm>
+          <a:prstGeom prst="rect">
+            <a:avLst/>
+          </a:prstGeom>
+          <a:noFill/>
+        </p:spPr>
+        <p:txBody>
+          <a:bodyPr wrap="square">
+            <a:spAutoFit/>
+          </a:bodyPr>
+          <a:lstStyle/>
+          <a:p>
+            <a:pPr algn="l">
+              <a:spcAft>
+                <a:spcPts val="880"/>
+              </a:spcAft>
+              <a:defRPr sz="2200" b="1">
+                <a:solidFill>
+                  <a:srgbClr val="1A1A2E"/>
+                </a:solidFill>
+              </a:defRPr>
+            </a:pPr>
+            <a:r>
+              <a:t>ROC &amp; Precision-Recall Curves</a:t>
             </a:r>
           </a:p>
         </p:txBody>
       </p:sp>
       <p:pic>
         <p:nvPicPr>
-          <p:cNvPr id="4" name="Picture 3" descr="fig_model_comparison.png"/>
+          <p:cNvPr id="3" name="Picture 2" descr="fig_model_comparison.png"/>
           <p:cNvPicPr>
             <a:picLocks noChangeAspect="1"/>
           </p:cNvPicPr>
@@ -5201,396 +6727,14 @@
         </p:blipFill>
         <p:spPr>
           <a:xfrm>
-            <a:off x="731520" y="1188720"/>
-            <a:ext cx="7680960" cy="2683531"/>
+            <a:off x="548640" y="1005840"/>
+            <a:ext cx="8046720" cy="2811318"/>
           </a:xfrm>
           <a:prstGeom prst="rect">
             <a:avLst/>
           </a:prstGeom>
         </p:spPr>
       </p:pic>
-      <p:sp>
-        <p:nvSpPr>
-          <p:cNvPr id="5" name="TextBox 4"/>
-          <p:cNvSpPr txBox="1"/>
-          <p:nvPr/>
-        </p:nvSpPr>
-        <p:spPr>
-          <a:xfrm>
-            <a:off x="457200" y="6400800"/>
-            <a:ext cx="8229600" cy="457200"/>
-          </a:xfrm>
-          <a:prstGeom prst="rect">
-            <a:avLst/>
-          </a:prstGeom>
-          <a:noFill/>
-        </p:spPr>
-        <p:txBody>
-          <a:bodyPr wrap="square">
-            <a:spAutoFit/>
-          </a:bodyPr>
-          <a:lstStyle/>
-          <a:p>
-            <a:pPr algn="l">
-              <a:defRPr sz="1100" b="0">
-                <a:solidFill>
-                  <a:srgbClr val="1654CC"/>
-                </a:solidFill>
-              </a:defRPr>
-            </a:pPr>
-            <a:r>
-              <a:t>Left: ROC curve (overall discrimination). Right: PR curve (performance on the rare positive class).</a:t>
-            </a:r>
-          </a:p>
-        </p:txBody>
-      </p:sp>
-    </p:spTree>
-  </p:cSld>
-  <p:clrMapOvr>
-    <a:masterClrMapping/>
-  </p:clrMapOvr>
-</p:sld>
-</file>
-
-<file path=ppt/slides/slide8.xml><?xml version="1.0" encoding="utf-8"?>
-<p:sld xmlns:a="http://schemas.openxmlformats.org/drawingml/2006/main" xmlns:p="http://schemas.openxmlformats.org/presentationml/2006/main" xmlns:r="http://schemas.openxmlformats.org/officeDocument/2006/relationships">
-  <p:cSld>
-    <p:spTree>
-      <p:nvGrpSpPr>
-        <p:cNvPr id="1" name=""/>
-        <p:cNvGrpSpPr/>
-        <p:nvPr/>
-      </p:nvGrpSpPr>
-      <p:grpSpPr/>
-      <p:sp>
-        <p:nvSpPr>
-          <p:cNvPr id="2" name="Title 1"/>
-          <p:cNvSpPr>
-            <a:spLocks noGrp="1"/>
-          </p:cNvSpPr>
-          <p:nvPr>
-            <p:ph type="title"/>
-          </p:nvPr>
-        </p:nvSpPr>
-        <p:spPr/>
-        <p:txBody>
-          <a:bodyPr/>
-          <a:lstStyle/>
-          <a:p>
-            <a:pPr>
-              <a:defRPr sz="2800">
-                <a:solidFill>
-                  <a:srgbClr val="1A1A2E"/>
-                </a:solidFill>
-              </a:defRPr>
-            </a:pPr>
-            <a:r>
-              <a:t>Threshold Selection</a:t>
-            </a:r>
-          </a:p>
-        </p:txBody>
-      </p:sp>
-      <p:sp>
-        <p:nvSpPr>
-          <p:cNvPr id="3" name="Content Placeholder 2"/>
-          <p:cNvSpPr>
-            <a:spLocks noGrp="1"/>
-          </p:cNvSpPr>
-          <p:nvPr>
-            <p:ph idx="1"/>
-          </p:nvPr>
-        </p:nvSpPr>
-        <p:spPr/>
-        <p:txBody>
-          <a:bodyPr/>
-          <a:lstStyle/>
-          <a:p>
-            <a:pPr>
-              <a:spcAft>
-                <a:spcPts val="1200"/>
-              </a:spcAft>
-              <a:defRPr sz="1400">
-                <a:solidFill>
-                  <a:srgbClr val="1654CC"/>
-                </a:solidFill>
-              </a:defRPr>
-            </a:pPr>
-            <a:r>
-              <a:t>Optimized for supply chain risk screening</a:t>
-            </a:r>
-          </a:p>
-          <a:p>
-            <a:pPr>
-              <a:spcAft>
-                <a:spcPts val="800"/>
-              </a:spcAft>
-              <a:defRPr sz="1600">
-                <a:solidFill>
-                  <a:srgbClr val="1A1A2E"/>
-                </a:solidFill>
-              </a:defRPr>
-            </a:pPr>
-            <a:r>
-              <a:t>Model outputs probability → threshold converts to yes/no decision</a:t>
-            </a:r>
-          </a:p>
-          <a:p>
-            <a:pPr>
-              <a:spcAft>
-                <a:spcPts val="800"/>
-              </a:spcAft>
-              <a:defRPr sz="1600">
-                <a:solidFill>
-                  <a:srgbClr val="1A1A2E"/>
-                </a:solidFill>
-              </a:defRPr>
-            </a:pPr>
-          </a:p>
-          <a:p>
-            <a:pPr>
-              <a:spcAft>
-                <a:spcPts val="800"/>
-              </a:spcAft>
-              <a:defRPr sz="1600">
-                <a:solidFill>
-                  <a:srgbClr val="1A1A2E"/>
-                </a:solidFill>
-              </a:defRPr>
-            </a:pPr>
-            <a:r>
-              <a:t>At threshold for 80% recall:</a:t>
-            </a:r>
-          </a:p>
-          <a:p>
-            <a:pPr>
-              <a:spcAft>
-                <a:spcPts val="800"/>
-              </a:spcAft>
-              <a:defRPr sz="1600">
-                <a:solidFill>
-                  <a:srgbClr val="1A1A2E"/>
-                </a:solidFill>
-              </a:defRPr>
-            </a:pPr>
-            <a:r>
-              <a:t>  • We catch 4 out of 5 facilities that will get OAI</a:t>
-            </a:r>
-          </a:p>
-          <a:p>
-            <a:pPr>
-              <a:spcAft>
-                <a:spcPts val="800"/>
-              </a:spcAft>
-              <a:defRPr sz="1600">
-                <a:solidFill>
-                  <a:srgbClr val="1A1A2E"/>
-                </a:solidFill>
-              </a:defRPr>
-            </a:pPr>
-            <a:r>
-              <a:t>  • ~6 false alarms per true alert</a:t>
-            </a:r>
-          </a:p>
-          <a:p>
-            <a:pPr>
-              <a:spcAft>
-                <a:spcPts val="800"/>
-              </a:spcAft>
-              <a:defRPr sz="1600">
-                <a:solidFill>
-                  <a:srgbClr val="1A1A2E"/>
-                </a:solidFill>
-              </a:defRPr>
-            </a:pPr>
-          </a:p>
-          <a:p>
-            <a:pPr>
-              <a:spcAft>
-                <a:spcPts val="800"/>
-              </a:spcAft>
-              <a:defRPr sz="1600">
-                <a:solidFill>
-                  <a:srgbClr val="1A1A2E"/>
-                </a:solidFill>
-              </a:defRPr>
-            </a:pPr>
-            <a:r>
-              <a:t>Why high recall: false negatives (missed risk) are more costly</a:t>
-            </a:r>
-          </a:p>
-          <a:p>
-            <a:pPr>
-              <a:spcAft>
-                <a:spcPts val="800"/>
-              </a:spcAft>
-              <a:defRPr sz="1600">
-                <a:solidFill>
-                  <a:srgbClr val="1A1A2E"/>
-                </a:solidFill>
-              </a:defRPr>
-            </a:pPr>
-            <a:r>
-              <a:t>than false positives (analyst reviews a safe supplier)</a:t>
-            </a:r>
-          </a:p>
-          <a:p>
-            <a:pPr>
-              <a:spcAft>
-                <a:spcPts val="800"/>
-              </a:spcAft>
-              <a:defRPr sz="1600">
-                <a:solidFill>
-                  <a:srgbClr val="1A1A2E"/>
-                </a:solidFill>
-              </a:defRPr>
-            </a:pPr>
-          </a:p>
-          <a:p>
-            <a:pPr>
-              <a:spcAft>
-                <a:spcPts val="800"/>
-              </a:spcAft>
-              <a:defRPr sz="1600">
-                <a:solidFill>
-                  <a:srgbClr val="1A1A2E"/>
-                </a:solidFill>
-              </a:defRPr>
-            </a:pPr>
-            <a:r>
-              <a:t>Threshold is configurable based on team review capacity</a:t>
-            </a:r>
-          </a:p>
-        </p:txBody>
-      </p:sp>
-    </p:spTree>
-  </p:cSld>
-  <p:clrMapOvr>
-    <a:masterClrMapping/>
-  </p:clrMapOvr>
-</p:sld>
-</file>
-
-<file path=ppt/slides/slide9.xml><?xml version="1.0" encoding="utf-8"?>
-<p:sld xmlns:a="http://schemas.openxmlformats.org/drawingml/2006/main" xmlns:p="http://schemas.openxmlformats.org/presentationml/2006/main" xmlns:r="http://schemas.openxmlformats.org/officeDocument/2006/relationships">
-  <p:cSld>
-    <p:spTree>
-      <p:nvGrpSpPr>
-        <p:cNvPr id="1" name=""/>
-        <p:cNvGrpSpPr/>
-        <p:nvPr/>
-      </p:nvGrpSpPr>
-      <p:grpSpPr/>
-      <p:sp>
-        <p:nvSpPr>
-          <p:cNvPr id="2" name="Title 1"/>
-          <p:cNvSpPr>
-            <a:spLocks noGrp="1"/>
-          </p:cNvSpPr>
-          <p:nvPr>
-            <p:ph type="title"/>
-          </p:nvPr>
-        </p:nvSpPr>
-        <p:spPr/>
-        <p:txBody>
-          <a:bodyPr/>
-          <a:lstStyle/>
-          <a:p/>
-        </p:txBody>
-      </p:sp>
-      <p:sp>
-        <p:nvSpPr>
-          <p:cNvPr id="3" name="TextBox 2"/>
-          <p:cNvSpPr txBox="1"/>
-          <p:nvPr/>
-        </p:nvSpPr>
-        <p:spPr>
-          <a:xfrm>
-            <a:off x="457200" y="274320"/>
-            <a:ext cx="8229600" cy="731520"/>
-          </a:xfrm>
-          <a:prstGeom prst="rect">
-            <a:avLst/>
-          </a:prstGeom>
-          <a:noFill/>
-        </p:spPr>
-        <p:txBody>
-          <a:bodyPr wrap="square">
-            <a:spAutoFit/>
-          </a:bodyPr>
-          <a:lstStyle/>
-          <a:p>
-            <a:pPr algn="l">
-              <a:defRPr sz="2400" b="1">
-                <a:solidFill>
-                  <a:srgbClr val="1A1A2E"/>
-                </a:solidFill>
-              </a:defRPr>
-            </a:pPr>
-            <a:r>
-              <a:t>Feature Importance (XGBoost)</a:t>
-            </a:r>
-          </a:p>
-        </p:txBody>
-      </p:sp>
-      <p:pic>
-        <p:nvPicPr>
-          <p:cNvPr id="4" name="Picture 3" descr="fig_feature_importance.png"/>
-          <p:cNvPicPr>
-            <a:picLocks noChangeAspect="1"/>
-          </p:cNvPicPr>
-          <p:nvPr/>
-        </p:nvPicPr>
-        <p:blipFill>
-          <a:blip r:embed="rId2"/>
-          <a:stretch>
-            <a:fillRect/>
-          </a:stretch>
-        </p:blipFill>
-        <p:spPr>
-          <a:xfrm>
-            <a:off x="731520" y="1188720"/>
-            <a:ext cx="7680960" cy="6050106"/>
-          </a:xfrm>
-          <a:prstGeom prst="rect">
-            <a:avLst/>
-          </a:prstGeom>
-        </p:spPr>
-      </p:pic>
-      <p:sp>
-        <p:nvSpPr>
-          <p:cNvPr id="5" name="TextBox 4"/>
-          <p:cNvSpPr txBox="1"/>
-          <p:nvPr/>
-        </p:nvSpPr>
-        <p:spPr>
-          <a:xfrm>
-            <a:off x="457200" y="6400800"/>
-            <a:ext cx="8229600" cy="457200"/>
-          </a:xfrm>
-          <a:prstGeom prst="rect">
-            <a:avLst/>
-          </a:prstGeom>
-          <a:noFill/>
-        </p:spPr>
-        <p:txBody>
-          <a:bodyPr wrap="square">
-            <a:spAutoFit/>
-          </a:bodyPr>
-          <a:lstStyle/>
-          <a:p>
-            <a:pPr algn="l">
-              <a:defRPr sz="1100" b="0">
-                <a:solidFill>
-                  <a:srgbClr val="1654CC"/>
-                </a:solidFill>
-              </a:defRPr>
-            </a:pPr>
-            <a:r>
-              <a:t>Dominant predictor: last inspection was OAI. Complementary signals from citations, recalls, and sector.</a:t>
-            </a:r>
-          </a:p>
-        </p:txBody>
-      </p:sp>
     </p:spTree>
   </p:cSld>
   <p:clrMapOvr>
